--- a/10-Knowledge-Products/KP1-GEA/videos/module_1/en/decks/KP1_M1_1.1_Deck_v0.2.pptx
+++ b/10-Knowledge-Products/KP1-GEA/videos/module_1/en/decks/KP1_M1_1.1_Deck_v0.2.pptx
@@ -14,12 +14,12 @@
     <p:handoutMasterId r:id="rId47"/>
   </p:handoutMasterIdLst>
   <p:sldIdLst>
-    <p:sldId id="2681" r:id="rId8"/>
     <p:sldId id="2696" r:id="rId18"/>
     <p:sldId id="2697" r:id="rId19"/>
     <p:sldId id="2698" r:id="rId20"/>
     <p:sldId id="2699" r:id="rId21"/>
     <p:sldId id="2700" r:id="rId22"/>
+    <p:sldId id="2701" r:id="rId23"/>
   </p:sldIdLst>
   <p:sldSz cx="12192000" cy="6858000"/>
   <p:notesSz cx="6858000" cy="9144000"/>
@@ -886,76 +886,6 @@
 </p:notesMaster>
 </file>
 
-<file path=ppt/notesSlides/notesSlide21.xml><?xml version="1.0" encoding="utf-8"?>
-<p:notes xmlns:a="http://schemas.openxmlformats.org/drawingml/2006/main" xmlns:p="http://schemas.openxmlformats.org/presentationml/2006/main" xmlns:r="http://schemas.openxmlformats.org/officeDocument/2006/relationships">
-  <p:cSld>
-    <p:spTree>
-      <p:nvGrpSpPr>
-        <p:cNvPr id="1" name=""/>
-        <p:cNvGrpSpPr/>
-        <p:nvPr/>
-      </p:nvGrpSpPr>
-      <p:grpSpPr>
-        <a:xfrm>
-          <a:off x="0" y="0"/>
-          <a:ext cx="0" cy="0"/>
-          <a:chOff x="0" y="0"/>
-          <a:chExt cx="0" cy="0"/>
-        </a:xfrm>
-      </p:grpSpPr>
-      <p:sp>
-        <p:nvSpPr>
-          <p:cNvPr id="2" name="Slide Image Placeholder 1"/>
-          <p:cNvSpPr>
-            <a:spLocks noGrp="1"/>
-          </p:cNvSpPr>
-          <p:nvPr>
-            <p:ph type="sldImg" idx="2"/>
-          </p:nvPr>
-        </p:nvSpPr>
-        <p:spPr/>
-      </p:sp>
-      <p:sp>
-        <p:nvSpPr>
-          <p:cNvPr id="3" name="Notes Placeholder 2"/>
-          <p:cNvSpPr>
-            <a:spLocks noGrp="1"/>
-          </p:cNvSpPr>
-          <p:nvPr>
-            <p:ph type="body" idx="3" sz="quarter"/>
-          </p:nvPr>
-        </p:nvSpPr>
-        <p:spPr/>
-        <p:txBody>
-          <a:bodyPr/>
-          <a:lstStyle/>
-          <a:p>
-            <a:r>
-              <a:t>Title card for standalone video 1.1. Content slides are identical to the corresponding section of the combined deck KP1_M1_Deck_v0.2.pptx; voice-over is in each slide’s notes.</a:t>
-            </a:r>
-          </a:p>
-        </p:txBody>
-      </p:sp>
-      <p:sp>
-        <p:nvSpPr>
-          <p:cNvPr id="4" name="Slide Number Placeholder 3"/>
-          <p:cNvSpPr>
-            <a:spLocks noGrp="1"/>
-          </p:cNvSpPr>
-          <p:nvPr>
-            <p:ph type="sldNum" idx="5" sz="quarter"/>
-          </p:nvPr>
-        </p:nvSpPr>
-        <p:spPr/>
-      </p:sp>
-    </p:spTree>
-  </p:cSld>
-  <p:clrMapOvr>
-    <a:masterClrMapping/>
-  </p:clrMapOvr>
-</p:notes>
-</file>
-
 <file path=ppt/notesSlides/notesSlide3.xml><?xml version="1.0" encoding="utf-8"?>
 <p:notes xmlns:a="http://schemas.openxmlformats.org/drawingml/2006/main" xmlns:p="http://schemas.openxmlformats.org/presentationml/2006/main" xmlns:r="http://schemas.openxmlformats.org/officeDocument/2006/relationships">
   <p:cSld>
@@ -1001,13 +931,7 @@
           <a:lstStyle/>
           <a:p>
             <a:r>
-              <a:t>VO, slide 1: You have probably seen this pattern. One programme builds a system to register citizens. Another builds another, for a different service. A third builds a third. Each takes years, funded separately. And your citizen still fills the same form five times, at five different counters.</a:t>
-            </a:r>
-          </a:p>
-          <a:p/>
-          <a:p>
-            <a:r>
-              <a:t>VO: You cannot fix this inside any one programme. Each programme is doing exactly what it was funded to do.</a:t>
+              <a:t>Title card — the cold open. The hosts name the module, the video number, the title and the single message on this slide; no scripted narration. Hold until the opener begins; the opener is narrated on the next slide.</a:t>
             </a:r>
           </a:p>
         </p:txBody>
@@ -1077,43 +1001,13 @@
           <a:lstStyle/>
           <a:p>
             <a:r>
-              <a:t>Rows reveal one at a time, cumulative.</a:t>
+              <a:t>VO: You have probably seen this pattern. One programme builds a system to register citizens. Another builds another, for a different service. A third builds a third. Each takes years, funded separately. And your citizen still fills the same form five times, at five different counters.</a:t>
             </a:r>
           </a:p>
           <a:p/>
           <a:p>
             <a:r>
-              <a:t>RETRIEVAL MOMENT (before revealing row 1): ask the viewer — how many separate registers of the same citizens does your government keep? Hold two seconds, then reveal.</a:t>
-            </a:r>
-          </a:p>
-          <a:p/>
-          <a:p>
-            <a:r>
-              <a:t>VO: There are four signs that this pattern is happening in your government.</a:t>
-            </a:r>
-          </a:p>
-          <a:p/>
-          <a:p>
-            <a:r>
-              <a:t>VO: Sign one. Your ministry has more than one register of the same people. The school list has one. The national ID register has another. The social register has a third. Each has its own list. None of them agree.</a:t>
-            </a:r>
-          </a:p>
-          <a:p/>
-          <a:p>
-            <a:r>
-              <a:t>VO: Sign two. Every time two systems need to share data, you build a new connection from zero. Last year your team connected the tax office to the business register. This year you are doing the same work for the health ministry. The connection is built again, from scratch.</a:t>
-            </a:r>
-          </a:p>
-          <a:p/>
-          <a:p>
-            <a:r>
-              <a:t>VO: Sign three. A vendor built one of your systems ten years ago. To change anything in it, you must call that vendor and pay what they ask. Nobody else knows how it works. The vendor knows this, and prices accordingly.</a:t>
-            </a:r>
-          </a:p>
-          <a:p/>
-          <a:p>
-            <a:r>
-              <a:t>VO: Sign four. Each ministry has its own digital systems, and they do not connect across ministries. The citizen who gave her ID number to the health ministry must give it again, on paper, when she enrols her child in school. The pledge to ask each citizen for information only once exists on paper. In practice, it is impossible.</a:t>
+              <a:t>VO: You cannot fix this inside any one programme. Each programme is doing exactly what it was funded to do.</a:t>
             </a:r>
           </a:p>
         </p:txBody>
@@ -1183,13 +1077,43 @@
           <a:lstStyle/>
           <a:p>
             <a:r>
-              <a:t>VO: The cost of this pattern runs in four directions at once. You pay more, because you build the same things many times. The country moves more slowly, because every new programme waits for cross-system work that nobody planned for. Your citizens carry the burden, because they fill the same form in five places. And your minister cannot deliver a flagship cross-ministry programme, because the systems will not talk to each other.</a:t>
+              <a:t>Rows reveal one at a time, cumulative.</a:t>
             </a:r>
           </a:p>
           <a:p/>
           <a:p>
             <a:r>
-              <a:t>The minister cell is the one to land hardest with a Strategist audience — it is highlighted deliberately.</a:t>
+              <a:t>RETRIEVAL MOMENT (before revealing row 1): ask the viewer — how many separate registers of the same citizens does your government keep? Hold two seconds, then reveal.</a:t>
+            </a:r>
+          </a:p>
+          <a:p/>
+          <a:p>
+            <a:r>
+              <a:t>VO: There are four signs that this pattern is happening in your government.</a:t>
+            </a:r>
+          </a:p>
+          <a:p/>
+          <a:p>
+            <a:r>
+              <a:t>VO: Sign one. Your ministry has more than one register of the same people. The school list has one. The national ID register has another. The social register has a third. Each has its own list. None of them agree.</a:t>
+            </a:r>
+          </a:p>
+          <a:p/>
+          <a:p>
+            <a:r>
+              <a:t>VO: Sign two. Every time two systems need to share data, you build a new connection from zero. Last year your team connected the tax office to the business register. This year you are doing the same work for the health ministry. The connection is built again, from scratch.</a:t>
+            </a:r>
+          </a:p>
+          <a:p/>
+          <a:p>
+            <a:r>
+              <a:t>VO: Sign three. A vendor built one of your systems ten years ago. To change anything in it, you must call that vendor and pay what they ask. Nobody else knows how it works. The vendor knows this, and prices accordingly.</a:t>
+            </a:r>
+          </a:p>
+          <a:p/>
+          <a:p>
+            <a:r>
+              <a:t>VO: Sign four. Each ministry has its own digital systems, and they do not connect across ministries. The citizen who gave her ID number to the health ministry must give it again, on paper, when she enrols her child in school. The pledge to ask each citizen for information only once exists on paper. In practice, it is impossible.</a:t>
             </a:r>
           </a:p>
         </p:txBody>
@@ -1259,19 +1183,13 @@
           <a:lstStyle/>
           <a:p>
             <a:r>
-              <a:t>PRACTICE BOX (on-screen only — never read it, never paraphrase it, never point at it). It replaces the narrated handoff: this video ends on the recap and the Sources slide.</a:t>
+              <a:t>VO: The cost of this pattern runs in four directions at once. You pay more, because you build the same things many times. The country moves more slowly, because every new programme waits for cross-system work that nobody planned for. Your citizens carry the burden, because they fill the same form in five places. And your minister cannot deliver a flagship cross-ministry programme, because the systems will not talk to each other.</a:t>
             </a:r>
           </a:p>
           <a:p/>
           <a:p>
             <a:r>
-              <a:t>VO: All four signs come from one root cause. There is no shared plan. No one has written down what your government's digital systems are, who owns them, and how they should fit together. That shared plan is what a national Enterprise Architecture provides. The rest of this knowledge product shows you how to commission one, what it will deliver, and what you will need from your minister to make it work.</a:t>
-            </a:r>
-          </a:p>
-          <a:p/>
-          <a:p>
-            <a:r>
-              <a:t>This is the most important slide of video 1.1 — hold it a beat longer.</a:t>
+              <a:t>The minister cell is the one to land hardest with a Strategist audience — it is highlighted deliberately.</a:t>
             </a:r>
           </a:p>
         </p:txBody>
@@ -1297,6 +1215,88 @@
 </file>
 
 <file path=ppt/notesSlides/notesSlide7.xml><?xml version="1.0" encoding="utf-8"?>
+<p:notes xmlns:a="http://schemas.openxmlformats.org/drawingml/2006/main" xmlns:p="http://schemas.openxmlformats.org/presentationml/2006/main" xmlns:r="http://schemas.openxmlformats.org/officeDocument/2006/relationships">
+  <p:cSld>
+    <p:spTree>
+      <p:nvGrpSpPr>
+        <p:cNvPr id="1" name=""/>
+        <p:cNvGrpSpPr/>
+        <p:nvPr/>
+      </p:nvGrpSpPr>
+      <p:grpSpPr>
+        <a:xfrm>
+          <a:off x="0" y="0"/>
+          <a:ext cx="0" cy="0"/>
+          <a:chOff x="0" y="0"/>
+          <a:chExt cx="0" cy="0"/>
+        </a:xfrm>
+      </p:grpSpPr>
+      <p:sp>
+        <p:nvSpPr>
+          <p:cNvPr id="2" name="Slide Image Placeholder 1"/>
+          <p:cNvSpPr>
+            <a:spLocks noGrp="1"/>
+          </p:cNvSpPr>
+          <p:nvPr>
+            <p:ph type="sldImg" idx="2"/>
+          </p:nvPr>
+        </p:nvSpPr>
+        <p:spPr/>
+      </p:sp>
+      <p:sp>
+        <p:nvSpPr>
+          <p:cNvPr id="3" name="Notes Placeholder 2"/>
+          <p:cNvSpPr>
+            <a:spLocks noGrp="1"/>
+          </p:cNvSpPr>
+          <p:nvPr>
+            <p:ph type="body" idx="3" sz="quarter"/>
+          </p:nvPr>
+        </p:nvSpPr>
+        <p:spPr/>
+        <p:txBody>
+          <a:bodyPr/>
+          <a:lstStyle/>
+          <a:p>
+            <a:r>
+              <a:t>PRACTICE BOX (on-screen only — never read it, never paraphrase it, never point at it). It replaces the narrated handoff: this video ends on the recap and the Sources slide.</a:t>
+            </a:r>
+          </a:p>
+          <a:p/>
+          <a:p>
+            <a:r>
+              <a:t>VO: All four signs come from one root cause. There is no shared plan. No one has written down what your government's digital systems are, who owns them, and how they should fit together. That shared plan is what a national Enterprise Architecture provides. The rest of this knowledge product shows you how to commission one, what it will deliver, and what you will need from your minister to make it work.</a:t>
+            </a:r>
+          </a:p>
+          <a:p/>
+          <a:p>
+            <a:r>
+              <a:t>This is the most important slide of video 1.1 — hold it a beat longer.</a:t>
+            </a:r>
+          </a:p>
+        </p:txBody>
+      </p:sp>
+      <p:sp>
+        <p:nvSpPr>
+          <p:cNvPr id="4" name="Slide Number Placeholder 3"/>
+          <p:cNvSpPr>
+            <a:spLocks noGrp="1"/>
+          </p:cNvSpPr>
+          <p:nvPr>
+            <p:ph type="sldNum" idx="5" sz="quarter"/>
+          </p:nvPr>
+        </p:nvSpPr>
+        <p:spPr/>
+      </p:sp>
+    </p:spTree>
+  </p:cSld>
+  <p:clrMapOvr>
+    <a:masterClrMapping/>
+  </p:clrMapOvr>
+</p:notes>
+</file>
+
+<file path=ppt/notesSlides/notesSlide8.xml><?xml version="1.0" encoding="utf-8"?>
 <p:notes xmlns:a="http://schemas.openxmlformats.org/drawingml/2006/main" xmlns:p="http://schemas.openxmlformats.org/presentationml/2006/main" xmlns:r="http://schemas.openxmlformats.org/officeDocument/2006/relationships">
   <p:cSld>
     <p:spTree>
@@ -11502,894 +11502,6 @@
 </p:sldMaster>
 </file>
 
-<file path=ppt/slides/slide1.xml><?xml version="1.0" encoding="utf-8"?>
-<p:sld xmlns:a="http://schemas.openxmlformats.org/drawingml/2006/main" xmlns:r="http://schemas.openxmlformats.org/officeDocument/2006/relationships" xmlns:p="http://schemas.openxmlformats.org/presentationml/2006/main">
-  <p:cSld>
-    <p:spTree>
-      <p:nvGrpSpPr>
-        <p:cNvPr id="1" name=""/>
-        <p:cNvGrpSpPr/>
-        <p:nvPr/>
-      </p:nvGrpSpPr>
-      <p:grpSpPr>
-        <a:xfrm>
-          <a:off x="0" y="0"/>
-          <a:ext cx="0" cy="0"/>
-          <a:chOff x="0" y="0"/>
-          <a:chExt cx="0" cy="0"/>
-        </a:xfrm>
-      </p:grpSpPr>
-      <p:cxnSp>
-        <p:nvCxnSpPr>
-          <p:cNvPr id="11" name="Straight Connector 10">
-            <a:extLst>
-              <a:ext uri="{FF2B5EF4-FFF2-40B4-BE49-F238E27FC236}">
-                <a16:creationId xmlns:a16="http://schemas.microsoft.com/office/drawing/2014/main" id="{D9AD66F2-F7C0-4D03-9150-D28F17AC561D}"/>
-              </a:ext>
-            </a:extLst>
-          </p:cNvPr>
-          <p:cNvCxnSpPr>
-            <a:cxnSpLocks/>
-          </p:cNvCxnSpPr>
-          <p:nvPr/>
-        </p:nvCxnSpPr>
-        <p:spPr>
-          <a:xfrm>
-            <a:off x="373021" y="2198718"/>
-            <a:ext cx="6843567" cy="0"/>
-          </a:xfrm>
-          <a:prstGeom prst="line">
-            <a:avLst/>
-          </a:prstGeom>
-          <a:ln w="12700">
-            <a:solidFill>
-              <a:srgbClr val="009CD6"/>
-            </a:solidFill>
-          </a:ln>
-        </p:spPr>
-        <p:style>
-          <a:lnRef idx="1">
-            <a:schemeClr val="accent1"/>
-          </a:lnRef>
-          <a:fillRef idx="0">
-            <a:schemeClr val="accent1"/>
-          </a:fillRef>
-          <a:effectRef idx="0">
-            <a:schemeClr val="accent1"/>
-          </a:effectRef>
-          <a:fontRef idx="minor">
-            <a:schemeClr val="tx1"/>
-          </a:fontRef>
-        </p:style>
-      </p:cxnSp>
-      <p:sp>
-        <p:nvSpPr>
-          <p:cNvPr id="12" name="Title 9">
-            <a:extLst>
-              <a:ext uri="{FF2B5EF4-FFF2-40B4-BE49-F238E27FC236}">
-                <a16:creationId xmlns:a16="http://schemas.microsoft.com/office/drawing/2014/main" id="{EEB08032-CE0E-4986-AEDF-A41026C0E8B9}"/>
-              </a:ext>
-            </a:extLst>
-          </p:cNvPr>
-          <p:cNvSpPr txBox="1">
-            <a:spLocks/>
-          </p:cNvSpPr>
-          <p:nvPr/>
-        </p:nvSpPr>
-        <p:spPr>
-          <a:xfrm>
-            <a:off x="237734" y="702833"/>
-            <a:ext cx="6432007" cy="1218817"/>
-          </a:xfrm>
-          <a:prstGeom prst="rect">
-            <a:avLst/>
-          </a:prstGeom>
-        </p:spPr>
-        <p:txBody>
-          <a:bodyPr anchor="b" wrap="square">
-            <a:noAutofit/>
-          </a:bodyPr>
-          <a:lstStyle>
-            <a:lvl1pPr algn="l" defTabSz="914400" rtl="0" eaLnBrk="1" latinLnBrk="0" hangingPunct="1">
-              <a:lnSpc>
-                <a:spcPct val="90000"/>
-              </a:lnSpc>
-              <a:spcBef>
-                <a:spcPct val="0"/>
-              </a:spcBef>
-              <a:buNone/>
-              <a:defRPr sz="4000" kern="1200">
-                <a:solidFill>
-                  <a:schemeClr val="bg1"/>
-                </a:solidFill>
-                <a:latin typeface="Arial" panose="020B0604020202020204" pitchFamily="34" charset="0"/>
-                <a:ea typeface="+mj-ea"/>
-                <a:cs typeface="Arial" panose="020B0604020202020204" pitchFamily="34" charset="0"/>
-              </a:defRPr>
-            </a:lvl1pPr>
-          </a:lstStyle>
-          <a:p>
-            <a:r>
-              <a:rPr sz="2800" b="1" i="0">
-                <a:solidFill>
-                  <a:srgbClr val="1A1A1A"/>
-                </a:solidFill>
-                <a:latin typeface="Arial"/>
-              </a:rPr>
-              <a:t>1.1 — Why your country needs a national EA</a:t>
-            </a:r>
-          </a:p>
-        </p:txBody>
-      </p:sp>
-      <p:pic>
-        <p:nvPicPr>
-          <p:cNvPr id="7" name="Picture 6">
-            <a:extLst>
-              <a:ext uri="{FF2B5EF4-FFF2-40B4-BE49-F238E27FC236}">
-                <a16:creationId xmlns:a16="http://schemas.microsoft.com/office/drawing/2014/main" id="{A2066351-C569-4C4C-A096-308777FCDC32}"/>
-              </a:ext>
-            </a:extLst>
-          </p:cNvPr>
-          <p:cNvPicPr>
-            <a:picLocks noChangeAspect="1"/>
-          </p:cNvPicPr>
-          <p:nvPr/>
-        </p:nvPicPr>
-        <p:blipFill>
-          <a:blip r:embed="rId2">
-            <a:extLst>
-              <a:ext uri="{28A0092B-C50C-407E-A947-70E740481C1C}">
-                <a14:useLocalDpi xmlns:a14="http://schemas.microsoft.com/office/drawing/2010/main" val="0"/>
-              </a:ext>
-            </a:extLst>
-          </a:blip>
-          <a:srcRect t="20219" b="14729"/>
-          <a:stretch>
-            <a:fillRect/>
-          </a:stretch>
-        </p:blipFill>
-        <p:spPr>
-          <a:xfrm>
-            <a:off x="0" y="5620871"/>
-            <a:ext cx="1323975" cy="1218816"/>
-          </a:xfrm>
-          <a:prstGeom prst="rect">
-            <a:avLst/>
-          </a:prstGeom>
-        </p:spPr>
-      </p:pic>
-      <p:sp>
-        <p:nvSpPr>
-          <p:cNvPr id="14" name="Title 9">
-            <a:extLst>
-              <a:ext uri="{FF2B5EF4-FFF2-40B4-BE49-F238E27FC236}">
-                <a16:creationId xmlns:a16="http://schemas.microsoft.com/office/drawing/2014/main" id="{B5087B80-3EE4-1881-0130-ED58CA625092}"/>
-              </a:ext>
-            </a:extLst>
-          </p:cNvPr>
-          <p:cNvSpPr txBox="1">
-            <a:spLocks/>
-          </p:cNvSpPr>
-          <p:nvPr/>
-        </p:nvSpPr>
-        <p:spPr>
-          <a:xfrm>
-            <a:off x="284452" y="2475786"/>
-            <a:ext cx="6382893" cy="953213"/>
-          </a:xfrm>
-          <a:prstGeom prst="rect">
-            <a:avLst/>
-          </a:prstGeom>
-        </p:spPr>
-        <p:txBody>
-          <a:bodyPr anchor="t" wrap="square">
-            <a:noAutofit/>
-          </a:bodyPr>
-          <a:lstStyle>
-            <a:lvl1pPr algn="l" defTabSz="914400" rtl="0" eaLnBrk="1" latinLnBrk="0" hangingPunct="1">
-              <a:lnSpc>
-                <a:spcPct val="90000"/>
-              </a:lnSpc>
-              <a:spcBef>
-                <a:spcPct val="0"/>
-              </a:spcBef>
-              <a:buNone/>
-              <a:defRPr sz="4000" kern="1200">
-                <a:solidFill>
-                  <a:schemeClr val="bg1"/>
-                </a:solidFill>
-                <a:latin typeface="Arial" panose="020B0604020202020204" pitchFamily="34" charset="0"/>
-                <a:ea typeface="+mj-ea"/>
-                <a:cs typeface="Arial" panose="020B0604020202020204" pitchFamily="34" charset="0"/>
-              </a:defRPr>
-            </a:lvl1pPr>
-          </a:lstStyle>
-          <a:p>
-            <a:pPr marL="0" marR="0" lvl="0" indent="0" rtl="0">
-              <a:spcBef>
-                <a:spcPts val="600"/>
-              </a:spcBef>
-              <a:spcAft>
-                <a:spcPts val="600"/>
-              </a:spcAft>
-              <a:buNone/>
-            </a:pPr>
-            <a:r>
-              <a:rPr sz="1300" b="1" i="0">
-                <a:solidFill>
-                  <a:srgbClr val="006E96"/>
-                </a:solidFill>
-                <a:latin typeface="Arial"/>
-              </a:rPr>
-              <a:t>KP1 · Government Enterprise Architecture · Module 1 · Video 1.1</a:t>
-            </a:r>
-          </a:p>
-          <a:p>
-            <a:r>
-              <a:rPr sz="1200" b="0" i="1">
-                <a:solidFill>
-                  <a:srgbClr val="595959"/>
-                </a:solidFill>
-                <a:latin typeface="Arial"/>
-              </a:rPr>
-              <a:t>Without a shared plan for your government’s digital systems, every new programme rebuilds what others have already built. The country pays. The citizen pays. Your minister cannot deliver what they promised.</a:t>
-            </a:r>
-          </a:p>
-        </p:txBody>
-      </p:sp>
-      <p:sp>
-        <p:nvSpPr>
-          <p:cNvPr id="17" name="Title 9">
-            <a:extLst>
-              <a:ext uri="{FF2B5EF4-FFF2-40B4-BE49-F238E27FC236}">
-                <a16:creationId xmlns:a16="http://schemas.microsoft.com/office/drawing/2014/main" id="{5E8796F7-DD26-D250-5E97-B38B22298E72}"/>
-              </a:ext>
-            </a:extLst>
-          </p:cNvPr>
-          <p:cNvSpPr txBox="1">
-            <a:spLocks/>
-          </p:cNvSpPr>
-          <p:nvPr/>
-        </p:nvSpPr>
-        <p:spPr>
-          <a:xfrm>
-            <a:off x="284452" y="4363897"/>
-            <a:ext cx="6382893" cy="953213"/>
-          </a:xfrm>
-          <a:prstGeom prst="rect">
-            <a:avLst/>
-          </a:prstGeom>
-        </p:spPr>
-        <p:txBody>
-          <a:bodyPr anchor="t" wrap="square">
-            <a:noAutofit/>
-          </a:bodyPr>
-          <a:lstStyle>
-            <a:lvl1pPr algn="l" defTabSz="914400" rtl="0" eaLnBrk="1" latinLnBrk="0" hangingPunct="1">
-              <a:lnSpc>
-                <a:spcPct val="90000"/>
-              </a:lnSpc>
-              <a:spcBef>
-                <a:spcPct val="0"/>
-              </a:spcBef>
-              <a:buNone/>
-              <a:defRPr sz="4000" kern="1200">
-                <a:solidFill>
-                  <a:schemeClr val="bg1"/>
-                </a:solidFill>
-                <a:latin typeface="Arial" panose="020B0604020202020204" pitchFamily="34" charset="0"/>
-                <a:ea typeface="+mj-ea"/>
-                <a:cs typeface="Arial" panose="020B0604020202020204" pitchFamily="34" charset="0"/>
-              </a:defRPr>
-            </a:lvl1pPr>
-          </a:lstStyle>
-          <a:p>
-            <a:pPr marL="0" marR="0" lvl="0" indent="0" rtl="0">
-              <a:spcBef>
-                <a:spcPts val="600"/>
-              </a:spcBef>
-              <a:spcAft>
-                <a:spcPts val="400"/>
-              </a:spcAft>
-              <a:buNone/>
-            </a:pPr>
-            <a:r>
-              <a:rPr sz="1400" b="1" i="0">
-                <a:solidFill>
-                  <a:srgbClr val="1A1A1A"/>
-                </a:solidFill>
-                <a:latin typeface="Arial"/>
-              </a:rPr>
-              <a:t>Target audience: </a:t>
-            </a:r>
-            <a:r>
-              <a:rPr sz="1400" b="0" i="0">
-                <a:solidFill>
-                  <a:srgbClr val="1A1A1A"/>
-                </a:solidFill>
-                <a:latin typeface="Arial"/>
-              </a:rPr>
-              <a:t>CDO · Director-General · sector minister</a:t>
-            </a:r>
-          </a:p>
-        </p:txBody>
-      </p:sp>
-      <p:sp>
-        <p:nvSpPr>
-          <p:cNvPr id="18" name="Rectangle 17"/>
-          <p:cNvSpPr/>
-          <p:nvPr/>
-        </p:nvSpPr>
-        <p:spPr>
-          <a:xfrm>
-            <a:off x="7022592" y="0"/>
-            <a:ext cx="5169103" cy="6858000"/>
-          </a:xfrm>
-          <a:prstGeom prst="rect">
-            <a:avLst/>
-          </a:prstGeom>
-          <a:solidFill>
-            <a:srgbClr val="009CD6"/>
-          </a:solidFill>
-          <a:ln>
-            <a:noFill/>
-          </a:ln>
-          <a:effectLst/>
-        </p:spPr>
-        <p:style>
-          <a:lnRef idx="1">
-            <a:schemeClr val="accent1"/>
-          </a:lnRef>
-          <a:fillRef idx="3">
-            <a:schemeClr val="accent1"/>
-          </a:fillRef>
-          <a:effectRef idx="2">
-            <a:schemeClr val="accent1"/>
-          </a:effectRef>
-          <a:fontRef idx="minor">
-            <a:schemeClr val="lt1"/>
-          </a:fontRef>
-        </p:style>
-        <p:txBody>
-          <a:bodyPr rtlCol="0" anchor="ctr"/>
-          <a:lstStyle/>
-          <a:p>
-            <a:pPr algn="ctr"/>
-          </a:p>
-        </p:txBody>
-      </p:sp>
-      <p:sp>
-        <p:nvSpPr>
-          <p:cNvPr id="19" name="TextBox 18"/>
-          <p:cNvSpPr txBox="1"/>
-          <p:nvPr/>
-        </p:nvSpPr>
-        <p:spPr>
-          <a:xfrm>
-            <a:off x="7452360" y="457200"/>
-            <a:ext cx="4297680" cy="457200"/>
-          </a:xfrm>
-          <a:prstGeom prst="rect">
-            <a:avLst/>
-          </a:prstGeom>
-          <a:noFill/>
-        </p:spPr>
-        <p:txBody>
-          <a:bodyPr wrap="square">
-            <a:spAutoFit/>
-          </a:bodyPr>
-          <a:lstStyle/>
-          <a:p>
-            <a:r>
-              <a:rPr sz="1100" b="1" i="0">
-                <a:solidFill>
-                  <a:srgbClr val="E5F5FB"/>
-                </a:solidFill>
-                <a:latin typeface="Arial"/>
-              </a:rPr>
-              <a:t>THE LIFECYCLE THIS MODULE TEACHES</a:t>
-            </a:r>
-          </a:p>
-        </p:txBody>
-      </p:sp>
-      <p:sp>
-        <p:nvSpPr>
-          <p:cNvPr id="20" name="Rounded Rectangle 19"/>
-          <p:cNvSpPr/>
-          <p:nvPr/>
-        </p:nvSpPr>
-        <p:spPr>
-          <a:xfrm>
-            <a:off x="7452360" y="960120"/>
-            <a:ext cx="3840480" cy="658368"/>
-          </a:xfrm>
-          <a:prstGeom prst="roundRect">
-            <a:avLst>
-              <a:gd name="adj" fmla="val 14000"/>
-            </a:avLst>
-          </a:prstGeom>
-          <a:solidFill>
-            <a:srgbClr val="FFFFFF"/>
-          </a:solidFill>
-          <a:ln>
-            <a:noFill/>
-          </a:ln>
-          <a:effectLst/>
-        </p:spPr>
-        <p:style>
-          <a:lnRef idx="1">
-            <a:schemeClr val="accent1"/>
-          </a:lnRef>
-          <a:fillRef idx="3">
-            <a:schemeClr val="accent1"/>
-          </a:fillRef>
-          <a:effectRef idx="2">
-            <a:schemeClr val="accent1"/>
-          </a:effectRef>
-          <a:fontRef idx="minor">
-            <a:schemeClr val="lt1"/>
-          </a:fontRef>
-        </p:style>
-        <p:txBody>
-          <a:bodyPr rtlCol="0" anchor="ctr" lIns="164592" wrap="square"/>
-          <a:lstStyle/>
-          <a:p>
-            <a:pPr algn="ctr"/>
-            <a:r>
-              <a:rPr sz="1500" b="1" i="0">
-                <a:solidFill>
-                  <a:srgbClr val="1A1A1A"/>
-                </a:solidFill>
-                <a:latin typeface="Arial"/>
-              </a:rPr>
-              <a:t>Discover</a:t>
-            </a:r>
-          </a:p>
-        </p:txBody>
-      </p:sp>
-      <p:sp>
-        <p:nvSpPr>
-          <p:cNvPr id="21" name="Diamond 20"/>
-          <p:cNvSpPr/>
-          <p:nvPr/>
-        </p:nvSpPr>
-        <p:spPr>
-          <a:xfrm>
-            <a:off x="7333488" y="1677924"/>
-            <a:ext cx="128016" cy="128016"/>
-          </a:xfrm>
-          <a:prstGeom prst="diamond">
-            <a:avLst/>
-          </a:prstGeom>
-          <a:solidFill>
-            <a:srgbClr val="E5F5FB"/>
-          </a:solidFill>
-          <a:ln>
-            <a:noFill/>
-          </a:ln>
-          <a:effectLst/>
-        </p:spPr>
-        <p:style>
-          <a:lnRef idx="1">
-            <a:schemeClr val="accent1"/>
-          </a:lnRef>
-          <a:fillRef idx="3">
-            <a:schemeClr val="accent1"/>
-          </a:fillRef>
-          <a:effectRef idx="2">
-            <a:schemeClr val="accent1"/>
-          </a:effectRef>
-          <a:fontRef idx="minor">
-            <a:schemeClr val="lt1"/>
-          </a:fontRef>
-        </p:style>
-        <p:txBody>
-          <a:bodyPr rtlCol="0" anchor="ctr"/>
-          <a:lstStyle/>
-          <a:p>
-            <a:pPr algn="ctr"/>
-          </a:p>
-        </p:txBody>
-      </p:sp>
-      <p:sp>
-        <p:nvSpPr>
-          <p:cNvPr id="22" name="Rounded Rectangle 21"/>
-          <p:cNvSpPr/>
-          <p:nvPr/>
-        </p:nvSpPr>
-        <p:spPr>
-          <a:xfrm>
-            <a:off x="7452360" y="1892808"/>
-            <a:ext cx="3840480" cy="658368"/>
-          </a:xfrm>
-          <a:prstGeom prst="roundRect">
-            <a:avLst>
-              <a:gd name="adj" fmla="val 14000"/>
-            </a:avLst>
-          </a:prstGeom>
-          <a:solidFill>
-            <a:srgbClr val="FFFFFF"/>
-          </a:solidFill>
-          <a:ln>
-            <a:noFill/>
-          </a:ln>
-          <a:effectLst/>
-        </p:spPr>
-        <p:style>
-          <a:lnRef idx="1">
-            <a:schemeClr val="accent1"/>
-          </a:lnRef>
-          <a:fillRef idx="3">
-            <a:schemeClr val="accent1"/>
-          </a:fillRef>
-          <a:effectRef idx="2">
-            <a:schemeClr val="accent1"/>
-          </a:effectRef>
-          <a:fontRef idx="minor">
-            <a:schemeClr val="lt1"/>
-          </a:fontRef>
-        </p:style>
-        <p:txBody>
-          <a:bodyPr rtlCol="0" anchor="ctr" lIns="164592" wrap="square"/>
-          <a:lstStyle/>
-          <a:p>
-            <a:pPr algn="ctr"/>
-            <a:r>
-              <a:rPr sz="1500" b="1" i="0">
-                <a:solidFill>
-                  <a:srgbClr val="1A1A1A"/>
-                </a:solidFill>
-                <a:latin typeface="Arial"/>
-              </a:rPr>
-              <a:t>Assess</a:t>
-            </a:r>
-          </a:p>
-        </p:txBody>
-      </p:sp>
-      <p:sp>
-        <p:nvSpPr>
-          <p:cNvPr id="23" name="Diamond 22"/>
-          <p:cNvSpPr/>
-          <p:nvPr/>
-        </p:nvSpPr>
-        <p:spPr>
-          <a:xfrm>
-            <a:off x="7333488" y="2610612"/>
-            <a:ext cx="128016" cy="128016"/>
-          </a:xfrm>
-          <a:prstGeom prst="diamond">
-            <a:avLst/>
-          </a:prstGeom>
-          <a:solidFill>
-            <a:srgbClr val="E5F5FB"/>
-          </a:solidFill>
-          <a:ln>
-            <a:noFill/>
-          </a:ln>
-          <a:effectLst/>
-        </p:spPr>
-        <p:style>
-          <a:lnRef idx="1">
-            <a:schemeClr val="accent1"/>
-          </a:lnRef>
-          <a:fillRef idx="3">
-            <a:schemeClr val="accent1"/>
-          </a:fillRef>
-          <a:effectRef idx="2">
-            <a:schemeClr val="accent1"/>
-          </a:effectRef>
-          <a:fontRef idx="minor">
-            <a:schemeClr val="lt1"/>
-          </a:fontRef>
-        </p:style>
-        <p:txBody>
-          <a:bodyPr rtlCol="0" anchor="ctr"/>
-          <a:lstStyle/>
-          <a:p>
-            <a:pPr algn="ctr"/>
-          </a:p>
-        </p:txBody>
-      </p:sp>
-      <p:sp>
-        <p:nvSpPr>
-          <p:cNvPr id="24" name="Rounded Rectangle 23"/>
-          <p:cNvSpPr/>
-          <p:nvPr/>
-        </p:nvSpPr>
-        <p:spPr>
-          <a:xfrm>
-            <a:off x="7452360" y="2825496"/>
-            <a:ext cx="3840480" cy="658368"/>
-          </a:xfrm>
-          <a:prstGeom prst="roundRect">
-            <a:avLst>
-              <a:gd name="adj" fmla="val 14000"/>
-            </a:avLst>
-          </a:prstGeom>
-          <a:solidFill>
-            <a:srgbClr val="FFFFFF"/>
-          </a:solidFill>
-          <a:ln>
-            <a:noFill/>
-          </a:ln>
-          <a:effectLst/>
-        </p:spPr>
-        <p:style>
-          <a:lnRef idx="1">
-            <a:schemeClr val="accent1"/>
-          </a:lnRef>
-          <a:fillRef idx="3">
-            <a:schemeClr val="accent1"/>
-          </a:fillRef>
-          <a:effectRef idx="2">
-            <a:schemeClr val="accent1"/>
-          </a:effectRef>
-          <a:fontRef idx="minor">
-            <a:schemeClr val="lt1"/>
-          </a:fontRef>
-        </p:style>
-        <p:txBody>
-          <a:bodyPr rtlCol="0" anchor="ctr" lIns="164592" wrap="square"/>
-          <a:lstStyle/>
-          <a:p>
-            <a:pPr algn="ctr"/>
-            <a:r>
-              <a:rPr sz="1500" b="1" i="0">
-                <a:solidFill>
-                  <a:srgbClr val="1A1A1A"/>
-                </a:solidFill>
-                <a:latin typeface="Arial"/>
-              </a:rPr>
-              <a:t>Adapt</a:t>
-            </a:r>
-          </a:p>
-        </p:txBody>
-      </p:sp>
-      <p:sp>
-        <p:nvSpPr>
-          <p:cNvPr id="25" name="Diamond 24"/>
-          <p:cNvSpPr/>
-          <p:nvPr/>
-        </p:nvSpPr>
-        <p:spPr>
-          <a:xfrm>
-            <a:off x="7333488" y="3543300"/>
-            <a:ext cx="128016" cy="128016"/>
-          </a:xfrm>
-          <a:prstGeom prst="diamond">
-            <a:avLst/>
-          </a:prstGeom>
-          <a:solidFill>
-            <a:srgbClr val="E5F5FB"/>
-          </a:solidFill>
-          <a:ln>
-            <a:noFill/>
-          </a:ln>
-          <a:effectLst/>
-        </p:spPr>
-        <p:style>
-          <a:lnRef idx="1">
-            <a:schemeClr val="accent1"/>
-          </a:lnRef>
-          <a:fillRef idx="3">
-            <a:schemeClr val="accent1"/>
-          </a:fillRef>
-          <a:effectRef idx="2">
-            <a:schemeClr val="accent1"/>
-          </a:effectRef>
-          <a:fontRef idx="minor">
-            <a:schemeClr val="lt1"/>
-          </a:fontRef>
-        </p:style>
-        <p:txBody>
-          <a:bodyPr rtlCol="0" anchor="ctr"/>
-          <a:lstStyle/>
-          <a:p>
-            <a:pPr algn="ctr"/>
-          </a:p>
-        </p:txBody>
-      </p:sp>
-      <p:sp>
-        <p:nvSpPr>
-          <p:cNvPr id="26" name="Rounded Rectangle 25"/>
-          <p:cNvSpPr/>
-          <p:nvPr/>
-        </p:nvSpPr>
-        <p:spPr>
-          <a:xfrm>
-            <a:off x="7452360" y="3758184"/>
-            <a:ext cx="3840480" cy="658368"/>
-          </a:xfrm>
-          <a:prstGeom prst="roundRect">
-            <a:avLst>
-              <a:gd name="adj" fmla="val 14000"/>
-            </a:avLst>
-          </a:prstGeom>
-          <a:solidFill>
-            <a:srgbClr val="FFFFFF"/>
-          </a:solidFill>
-          <a:ln>
-            <a:noFill/>
-          </a:ln>
-          <a:effectLst/>
-        </p:spPr>
-        <p:style>
-          <a:lnRef idx="1">
-            <a:schemeClr val="accent1"/>
-          </a:lnRef>
-          <a:fillRef idx="3">
-            <a:schemeClr val="accent1"/>
-          </a:fillRef>
-          <a:effectRef idx="2">
-            <a:schemeClr val="accent1"/>
-          </a:effectRef>
-          <a:fontRef idx="minor">
-            <a:schemeClr val="lt1"/>
-          </a:fontRef>
-        </p:style>
-        <p:txBody>
-          <a:bodyPr rtlCol="0" anchor="ctr" lIns="164592" wrap="square"/>
-          <a:lstStyle/>
-          <a:p>
-            <a:pPr algn="ctr"/>
-            <a:r>
-              <a:rPr sz="1500" b="1" i="0">
-                <a:solidFill>
-                  <a:srgbClr val="1A1A1A"/>
-                </a:solidFill>
-                <a:latin typeface="Arial"/>
-              </a:rPr>
-              <a:t>Plan</a:t>
-            </a:r>
-          </a:p>
-        </p:txBody>
-      </p:sp>
-      <p:sp>
-        <p:nvSpPr>
-          <p:cNvPr id="27" name="Diamond 26"/>
-          <p:cNvSpPr/>
-          <p:nvPr/>
-        </p:nvSpPr>
-        <p:spPr>
-          <a:xfrm>
-            <a:off x="7333488" y="4475988"/>
-            <a:ext cx="128016" cy="128016"/>
-          </a:xfrm>
-          <a:prstGeom prst="diamond">
-            <a:avLst/>
-          </a:prstGeom>
-          <a:solidFill>
-            <a:srgbClr val="E5F5FB"/>
-          </a:solidFill>
-          <a:ln>
-            <a:noFill/>
-          </a:ln>
-          <a:effectLst/>
-        </p:spPr>
-        <p:style>
-          <a:lnRef idx="1">
-            <a:schemeClr val="accent1"/>
-          </a:lnRef>
-          <a:fillRef idx="3">
-            <a:schemeClr val="accent1"/>
-          </a:fillRef>
-          <a:effectRef idx="2">
-            <a:schemeClr val="accent1"/>
-          </a:effectRef>
-          <a:fontRef idx="minor">
-            <a:schemeClr val="lt1"/>
-          </a:fontRef>
-        </p:style>
-        <p:txBody>
-          <a:bodyPr rtlCol="0" anchor="ctr"/>
-          <a:lstStyle/>
-          <a:p>
-            <a:pPr algn="ctr"/>
-          </a:p>
-        </p:txBody>
-      </p:sp>
-      <p:sp>
-        <p:nvSpPr>
-          <p:cNvPr id="28" name="Rounded Rectangle 27"/>
-          <p:cNvSpPr/>
-          <p:nvPr/>
-        </p:nvSpPr>
-        <p:spPr>
-          <a:xfrm>
-            <a:off x="7452360" y="4690872"/>
-            <a:ext cx="3840480" cy="658368"/>
-          </a:xfrm>
-          <a:prstGeom prst="roundRect">
-            <a:avLst>
-              <a:gd name="adj" fmla="val 14000"/>
-            </a:avLst>
-          </a:prstGeom>
-          <a:solidFill>
-            <a:srgbClr val="006E96"/>
-          </a:solidFill>
-          <a:ln>
-            <a:noFill/>
-          </a:ln>
-          <a:effectLst/>
-        </p:spPr>
-        <p:style>
-          <a:lnRef idx="1">
-            <a:schemeClr val="accent1"/>
-          </a:lnRef>
-          <a:fillRef idx="3">
-            <a:schemeClr val="accent1"/>
-          </a:fillRef>
-          <a:effectRef idx="2">
-            <a:schemeClr val="accent1"/>
-          </a:effectRef>
-          <a:fontRef idx="minor">
-            <a:schemeClr val="lt1"/>
-          </a:fontRef>
-        </p:style>
-        <p:txBody>
-          <a:bodyPr rtlCol="0" anchor="ctr" lIns="164592" wrap="square"/>
-          <a:lstStyle/>
-          <a:p>
-            <a:pPr algn="ctr"/>
-            <a:r>
-              <a:rPr sz="1500" b="1" i="0">
-                <a:solidFill>
-                  <a:srgbClr val="FFFFFF"/>
-                </a:solidFill>
-                <a:latin typeface="Arial"/>
-              </a:rPr>
-              <a:t>Execute &amp; Govern</a:t>
-            </a:r>
-          </a:p>
-        </p:txBody>
-      </p:sp>
-      <p:sp>
-        <p:nvSpPr>
-          <p:cNvPr id="29" name="TextBox 28"/>
-          <p:cNvSpPr txBox="1"/>
-          <p:nvPr/>
-        </p:nvSpPr>
-        <p:spPr>
-          <a:xfrm>
-            <a:off x="7452360" y="5806440"/>
-            <a:ext cx="4297680" cy="731520"/>
-          </a:xfrm>
-          <a:prstGeom prst="rect">
-            <a:avLst/>
-          </a:prstGeom>
-          <a:noFill/>
-        </p:spPr>
-        <p:txBody>
-          <a:bodyPr wrap="square">
-            <a:spAutoFit/>
-          </a:bodyPr>
-          <a:lstStyle/>
-          <a:p>
-            <a:r>
-              <a:rPr sz="1200" b="0" i="0">
-                <a:solidFill>
-                  <a:srgbClr val="FFFFFF"/>
-                </a:solidFill>
-                <a:latin typeface="Arial"/>
-              </a:rPr>
-              <a:t>4 sign-offs · 6 months to a roadmap · then ongoing</a:t>
-            </a:r>
-          </a:p>
-        </p:txBody>
-      </p:sp>
-    </p:spTree>
-    <p:extLst>
-      <p:ext uri="{BB962C8B-B14F-4D97-AF65-F5344CB8AC3E}">
-        <p14:creationId xmlns:p14="http://schemas.microsoft.com/office/powerpoint/2010/main" val="1196800265"/>
-      </p:ext>
-    </p:extLst>
-  </p:cSld>
-  <p:clrMapOvr>
-    <a:masterClrMapping/>
-  </p:clrMapOvr>
-</p:sld>
-</file>
-
 <file path=ppt/slides/slide3.xml><?xml version="1.0" encoding="utf-8"?>
 <p:sld xmlns:a="http://schemas.openxmlformats.org/drawingml/2006/main" xmlns:p="http://schemas.openxmlformats.org/presentationml/2006/main" xmlns:r="http://schemas.openxmlformats.org/officeDocument/2006/relationships">
   <p:cSld>
@@ -12590,58 +11702,14 @@
       <p:grpSpPr/>
       <p:sp>
         <p:nvSpPr>
-          <p:cNvPr id="2" name="Rectangle 1"/>
-          <p:cNvSpPr/>
-          <p:nvPr/>
-        </p:nvSpPr>
-        <p:spPr>
-          <a:xfrm>
-            <a:off x="457200" y="384048"/>
-            <a:ext cx="45720" cy="256032"/>
-          </a:xfrm>
-          <a:prstGeom prst="rect">
-            <a:avLst/>
-          </a:prstGeom>
-          <a:solidFill>
-            <a:srgbClr val="009CD6"/>
-          </a:solidFill>
-          <a:ln>
-            <a:noFill/>
-          </a:ln>
-          <a:effectLst/>
-        </p:spPr>
-        <p:style>
-          <a:lnRef idx="1">
-            <a:schemeClr val="accent1"/>
-          </a:lnRef>
-          <a:fillRef idx="3">
-            <a:schemeClr val="accent1"/>
-          </a:fillRef>
-          <a:effectRef idx="2">
-            <a:schemeClr val="accent1"/>
-          </a:effectRef>
-          <a:fontRef idx="minor">
-            <a:schemeClr val="lt1"/>
-          </a:fontRef>
-        </p:style>
-        <p:txBody>
-          <a:bodyPr rtlCol="0" anchor="ctr"/>
-          <a:lstStyle/>
-          <a:p>
-            <a:pPr algn="ctr"/>
-          </a:p>
-        </p:txBody>
-      </p:sp>
-      <p:sp>
-        <p:nvSpPr>
-          <p:cNvPr id="3" name="TextBox 2"/>
+          <p:cNvPr id="2" name="TextBox 1"/>
           <p:cNvSpPr txBox="1"/>
           <p:nvPr/>
         </p:nvSpPr>
         <p:spPr>
           <a:xfrm>
-            <a:off x="621792" y="274320"/>
-            <a:ext cx="11247120" cy="914400"/>
+            <a:off x="1005840" y="1325880"/>
+            <a:ext cx="5486400" cy="365760"/>
           </a:xfrm>
           <a:prstGeom prst="rect">
             <a:avLst/>
@@ -12655,80 +11723,61 @@
           <a:lstStyle/>
           <a:p>
             <a:r>
-              <a:rPr sz="2800" b="1" i="0">
+              <a:rPr sz="1200" b="1" i="0">
+                <a:solidFill>
+                  <a:srgbClr val="006E96"/>
+                </a:solidFill>
+                <a:latin typeface="Arial"/>
+              </a:rPr>
+              <a:t>WHERE WE START</a:t>
+            </a:r>
+          </a:p>
+        </p:txBody>
+      </p:sp>
+      <p:sp>
+        <p:nvSpPr>
+          <p:cNvPr id="3" name="TextBox 2"/>
+          <p:cNvSpPr txBox="1"/>
+          <p:nvPr/>
+        </p:nvSpPr>
+        <p:spPr>
+          <a:xfrm>
+            <a:off x="1005840" y="1783080"/>
+            <a:ext cx="10149840" cy="1737360"/>
+          </a:xfrm>
+          <a:prstGeom prst="rect">
+            <a:avLst/>
+          </a:prstGeom>
+          <a:noFill/>
+        </p:spPr>
+        <p:txBody>
+          <a:bodyPr wrap="square">
+            <a:spAutoFit/>
+          </a:bodyPr>
+          <a:lstStyle/>
+          <a:p>
+            <a:r>
+              <a:rPr sz="3000" b="1" i="0">
                 <a:solidFill>
                   <a:srgbClr val="1A1A1A"/>
                 </a:solidFill>
                 <a:latin typeface="Arial"/>
               </a:rPr>
-              <a:t>Four signs your government has no shared plan</a:t>
+              <a:t>One citizen. Five counters. The same form, five times.</a:t>
             </a:r>
           </a:p>
         </p:txBody>
       </p:sp>
       <p:sp>
         <p:nvSpPr>
-          <p:cNvPr id="4" name="Oval 3"/>
-          <p:cNvSpPr/>
-          <p:nvPr/>
-        </p:nvSpPr>
-        <p:spPr>
-          <a:xfrm>
-            <a:off x="621792" y="1463040"/>
-            <a:ext cx="310896" cy="310896"/>
-          </a:xfrm>
-          <a:prstGeom prst="ellipse">
-            <a:avLst/>
-          </a:prstGeom>
-          <a:solidFill>
-            <a:srgbClr val="009CD6"/>
-          </a:solidFill>
-          <a:ln>
-            <a:noFill/>
-          </a:ln>
-          <a:effectLst/>
-        </p:spPr>
-        <p:style>
-          <a:lnRef idx="1">
-            <a:schemeClr val="accent1"/>
-          </a:lnRef>
-          <a:fillRef idx="3">
-            <a:schemeClr val="accent1"/>
-          </a:fillRef>
-          <a:effectRef idx="2">
-            <a:schemeClr val="accent1"/>
-          </a:effectRef>
-          <a:fontRef idx="minor">
-            <a:schemeClr val="lt1"/>
-          </a:fontRef>
-        </p:style>
-        <p:txBody>
-          <a:bodyPr rtlCol="0" anchor="ctr" lIns="0" rIns="0" tIns="0" bIns="0" wrap="square"/>
-          <a:lstStyle/>
-          <a:p>
-            <a:pPr algn="ctr"/>
-            <a:r>
-              <a:rPr sz="1300" b="1" i="0">
-                <a:solidFill>
-                  <a:srgbClr val="FFFFFF"/>
-                </a:solidFill>
-                <a:latin typeface="Arial"/>
-              </a:rPr>
-              <a:t>1</a:t>
-            </a:r>
-          </a:p>
-        </p:txBody>
-      </p:sp>
-      <p:sp>
-        <p:nvSpPr>
-          <p:cNvPr id="5" name="TextBox 4"/>
+          <p:cNvPr id="4" name="TextBox 3"/>
           <p:cNvSpPr txBox="1"/>
           <p:nvPr/>
         </p:nvSpPr>
         <p:spPr>
           <a:xfrm>
-            <a:off x="1115568" y="1417320"/>
-            <a:ext cx="10527487" cy="1165860"/>
+            <a:off x="1005840" y="3611880"/>
+            <a:ext cx="10149840" cy="2377440"/>
           </a:xfrm>
           <a:prstGeom prst="rect">
             <a:avLst/>
@@ -12743,496 +11792,56 @@
           <a:p>
             <a:pPr>
               <a:spcAft>
-                <a:spcPts val="300"/>
+                <a:spcPts val="800"/>
               </a:spcAft>
             </a:pPr>
             <a:r>
-              <a:rPr sz="1900" b="1" i="0">
-                <a:solidFill>
-                  <a:srgbClr val="1A1A1A"/>
-                </a:solidFill>
-                <a:latin typeface="Arial"/>
-              </a:rPr>
-              <a:t>More than one register of the same people</a:t>
-            </a:r>
-          </a:p>
-          <a:p>
-            <a:pPr>
-              <a:spcAft>
-                <a:spcPts val="300"/>
-              </a:spcAft>
-            </a:pPr>
-            <a:r>
-              <a:rPr sz="1550" b="0" i="0">
+              <a:rPr sz="1700" b="0" i="0">
                 <a:solidFill>
                   <a:srgbClr val="595959"/>
                 </a:solidFill>
                 <a:latin typeface="Arial"/>
               </a:rPr>
-              <a:t>The school list has one. The national ID register has another. The social register has a third. None of them agree.</a:t>
-            </a:r>
-          </a:p>
-        </p:txBody>
-      </p:sp>
-      <p:sp>
-        <p:nvSpPr>
-          <p:cNvPr id="6" name="Rectangle 5"/>
-          <p:cNvSpPr/>
-          <p:nvPr/>
-        </p:nvSpPr>
-        <p:spPr>
-          <a:xfrm>
-            <a:off x="621792" y="2587752"/>
-            <a:ext cx="10881360" cy="12700"/>
-          </a:xfrm>
-          <a:prstGeom prst="rect">
-            <a:avLst/>
-          </a:prstGeom>
-          <a:solidFill>
-            <a:srgbClr val="DDECF4"/>
-          </a:solidFill>
-          <a:ln>
-            <a:noFill/>
-          </a:ln>
-          <a:effectLst/>
-        </p:spPr>
-        <p:style>
-          <a:lnRef idx="1">
-            <a:schemeClr val="accent1"/>
-          </a:lnRef>
-          <a:fillRef idx="3">
-            <a:schemeClr val="accent1"/>
-          </a:fillRef>
-          <a:effectRef idx="2">
-            <a:schemeClr val="accent1"/>
-          </a:effectRef>
-          <a:fontRef idx="minor">
-            <a:schemeClr val="lt1"/>
-          </a:fontRef>
-        </p:style>
-        <p:txBody>
-          <a:bodyPr rtlCol="0" anchor="ctr"/>
-          <a:lstStyle/>
-          <a:p>
-            <a:pPr algn="ctr"/>
-          </a:p>
-        </p:txBody>
-      </p:sp>
-      <p:sp>
-        <p:nvSpPr>
-          <p:cNvPr id="7" name="Oval 6"/>
-          <p:cNvSpPr/>
-          <p:nvPr/>
-        </p:nvSpPr>
-        <p:spPr>
-          <a:xfrm>
-            <a:off x="621792" y="2674620"/>
-            <a:ext cx="310896" cy="310896"/>
-          </a:xfrm>
-          <a:prstGeom prst="ellipse">
-            <a:avLst/>
-          </a:prstGeom>
-          <a:solidFill>
-            <a:srgbClr val="009CD6"/>
-          </a:solidFill>
-          <a:ln>
-            <a:noFill/>
-          </a:ln>
-          <a:effectLst/>
-        </p:spPr>
-        <p:style>
-          <a:lnRef idx="1">
-            <a:schemeClr val="accent1"/>
-          </a:lnRef>
-          <a:fillRef idx="3">
-            <a:schemeClr val="accent1"/>
-          </a:fillRef>
-          <a:effectRef idx="2">
-            <a:schemeClr val="accent1"/>
-          </a:effectRef>
-          <a:fontRef idx="minor">
-            <a:schemeClr val="lt1"/>
-          </a:fontRef>
-        </p:style>
-        <p:txBody>
-          <a:bodyPr rtlCol="0" anchor="ctr" lIns="0" rIns="0" tIns="0" bIns="0" wrap="square"/>
-          <a:lstStyle/>
-          <a:p>
-            <a:pPr algn="ctr"/>
-            <a:r>
-              <a:rPr sz="1300" b="1" i="0">
-                <a:solidFill>
-                  <a:srgbClr val="FFFFFF"/>
-                </a:solidFill>
-                <a:latin typeface="Arial"/>
-              </a:rPr>
-              <a:t>2</a:t>
-            </a:r>
-          </a:p>
-        </p:txBody>
-      </p:sp>
-      <p:sp>
-        <p:nvSpPr>
-          <p:cNvPr id="8" name="TextBox 7"/>
-          <p:cNvSpPr txBox="1"/>
-          <p:nvPr/>
-        </p:nvSpPr>
-        <p:spPr>
-          <a:xfrm>
-            <a:off x="1115568" y="2628900"/>
-            <a:ext cx="10527487" cy="1165860"/>
-          </a:xfrm>
-          <a:prstGeom prst="rect">
-            <a:avLst/>
-          </a:prstGeom>
-          <a:noFill/>
-        </p:spPr>
-        <p:txBody>
-          <a:bodyPr wrap="square">
-            <a:spAutoFit/>
-          </a:bodyPr>
-          <a:lstStyle/>
+              <a:t>One programme builds a system to register citizens. Another builds another. A third builds a third.</a:t>
+            </a:r>
+          </a:p>
           <a:p>
             <a:pPr>
               <a:spcAft>
-                <a:spcPts val="300"/>
+                <a:spcPts val="800"/>
               </a:spcAft>
             </a:pPr>
             <a:r>
-              <a:rPr sz="1900" b="1" i="0">
-                <a:solidFill>
-                  <a:srgbClr val="1A1A1A"/>
-                </a:solidFill>
-                <a:latin typeface="Arial"/>
-              </a:rPr>
-              <a:t>Every system-to-system link built from scratch</a:t>
-            </a:r>
-          </a:p>
-          <a:p>
-            <a:pPr>
-              <a:spcAft>
-                <a:spcPts val="300"/>
-              </a:spcAft>
-            </a:pPr>
-            <a:r>
-              <a:rPr sz="1550" b="0" i="0">
+              <a:rPr sz="1700" b="0" i="0">
                 <a:solidFill>
                   <a:srgbClr val="595959"/>
                 </a:solidFill>
                 <a:latin typeface="Arial"/>
               </a:rPr>
-              <a:t>Last year your team connected the tax office to the business register. This year, the same work again — for the health ministry.</a:t>
-            </a:r>
-          </a:p>
-        </p:txBody>
-      </p:sp>
-      <p:sp>
-        <p:nvSpPr>
-          <p:cNvPr id="9" name="Rectangle 8"/>
-          <p:cNvSpPr/>
-          <p:nvPr/>
-        </p:nvSpPr>
-        <p:spPr>
-          <a:xfrm>
-            <a:off x="621792" y="3799332"/>
-            <a:ext cx="10881360" cy="12700"/>
-          </a:xfrm>
-          <a:prstGeom prst="rect">
-            <a:avLst/>
-          </a:prstGeom>
-          <a:solidFill>
-            <a:srgbClr val="DDECF4"/>
-          </a:solidFill>
-          <a:ln>
-            <a:noFill/>
-          </a:ln>
-          <a:effectLst/>
-        </p:spPr>
-        <p:style>
-          <a:lnRef idx="1">
-            <a:schemeClr val="accent1"/>
-          </a:lnRef>
-          <a:fillRef idx="3">
-            <a:schemeClr val="accent1"/>
-          </a:fillRef>
-          <a:effectRef idx="2">
-            <a:schemeClr val="accent1"/>
-          </a:effectRef>
-          <a:fontRef idx="minor">
-            <a:schemeClr val="lt1"/>
-          </a:fontRef>
-        </p:style>
-        <p:txBody>
-          <a:bodyPr rtlCol="0" anchor="ctr"/>
-          <a:lstStyle/>
-          <a:p>
-            <a:pPr algn="ctr"/>
-          </a:p>
-        </p:txBody>
-      </p:sp>
-      <p:sp>
-        <p:nvSpPr>
-          <p:cNvPr id="10" name="Oval 9"/>
-          <p:cNvSpPr/>
-          <p:nvPr/>
-        </p:nvSpPr>
-        <p:spPr>
-          <a:xfrm>
-            <a:off x="621792" y="3886200"/>
-            <a:ext cx="310896" cy="310896"/>
-          </a:xfrm>
-          <a:prstGeom prst="ellipse">
-            <a:avLst/>
-          </a:prstGeom>
-          <a:solidFill>
-            <a:srgbClr val="009CD6"/>
-          </a:solidFill>
-          <a:ln>
-            <a:noFill/>
-          </a:ln>
-          <a:effectLst/>
-        </p:spPr>
-        <p:style>
-          <a:lnRef idx="1">
-            <a:schemeClr val="accent1"/>
-          </a:lnRef>
-          <a:fillRef idx="3">
-            <a:schemeClr val="accent1"/>
-          </a:fillRef>
-          <a:effectRef idx="2">
-            <a:schemeClr val="accent1"/>
-          </a:effectRef>
-          <a:fontRef idx="minor">
-            <a:schemeClr val="lt1"/>
-          </a:fontRef>
-        </p:style>
-        <p:txBody>
-          <a:bodyPr rtlCol="0" anchor="ctr" lIns="0" rIns="0" tIns="0" bIns="0" wrap="square"/>
-          <a:lstStyle/>
-          <a:p>
-            <a:pPr algn="ctr"/>
-            <a:r>
-              <a:rPr sz="1300" b="1" i="0">
-                <a:solidFill>
-                  <a:srgbClr val="FFFFFF"/>
-                </a:solidFill>
-                <a:latin typeface="Arial"/>
-              </a:rPr>
-              <a:t>3</a:t>
-            </a:r>
-          </a:p>
-        </p:txBody>
-      </p:sp>
-      <p:sp>
-        <p:nvSpPr>
-          <p:cNvPr id="11" name="TextBox 10"/>
-          <p:cNvSpPr txBox="1"/>
-          <p:nvPr/>
-        </p:nvSpPr>
-        <p:spPr>
-          <a:xfrm>
-            <a:off x="1115568" y="3840480"/>
-            <a:ext cx="10527487" cy="1165860"/>
-          </a:xfrm>
-          <a:prstGeom prst="rect">
-            <a:avLst/>
-          </a:prstGeom>
-          <a:noFill/>
-        </p:spPr>
-        <p:txBody>
-          <a:bodyPr wrap="square">
-            <a:spAutoFit/>
-          </a:bodyPr>
-          <a:lstStyle/>
+              <a:t>Each takes years, funded separately.</a:t>
+            </a:r>
+          </a:p>
           <a:p>
             <a:pPr>
               <a:spcAft>
-                <a:spcPts val="300"/>
+                <a:spcPts val="800"/>
               </a:spcAft>
             </a:pPr>
             <a:r>
-              <a:rPr sz="1900" b="1" i="0">
-                <a:solidFill>
-                  <a:srgbClr val="1A1A1A"/>
-                </a:solidFill>
-                <a:latin typeface="Arial"/>
-              </a:rPr>
-              <a:t>Vendor lock-in on systems built years ago</a:t>
-            </a:r>
-          </a:p>
-          <a:p>
-            <a:pPr>
-              <a:spcAft>
-                <a:spcPts val="300"/>
-              </a:spcAft>
-            </a:pPr>
-            <a:r>
-              <a:rPr sz="1550" b="0" i="0">
+              <a:rPr sz="1700" b="0" i="0">
                 <a:solidFill>
                   <a:srgbClr val="595959"/>
                 </a:solidFill>
                 <a:latin typeface="Arial"/>
               </a:rPr>
-              <a:t>One vendor built it ten years ago. To change anything, you call that vendor and pay what they ask. The vendor knows this, and prices accordingly.</a:t>
+              <a:t>You cannot fix this inside any one programme — each is doing exactly what it was funded to do.</a:t>
             </a:r>
           </a:p>
         </p:txBody>
       </p:sp>
       <p:sp>
         <p:nvSpPr>
-          <p:cNvPr id="12" name="Rectangle 11"/>
-          <p:cNvSpPr/>
-          <p:nvPr/>
-        </p:nvSpPr>
-        <p:spPr>
-          <a:xfrm>
-            <a:off x="621792" y="5010912"/>
-            <a:ext cx="10881360" cy="12700"/>
-          </a:xfrm>
-          <a:prstGeom prst="rect">
-            <a:avLst/>
-          </a:prstGeom>
-          <a:solidFill>
-            <a:srgbClr val="DDECF4"/>
-          </a:solidFill>
-          <a:ln>
-            <a:noFill/>
-          </a:ln>
-          <a:effectLst/>
-        </p:spPr>
-        <p:style>
-          <a:lnRef idx="1">
-            <a:schemeClr val="accent1"/>
-          </a:lnRef>
-          <a:fillRef idx="3">
-            <a:schemeClr val="accent1"/>
-          </a:fillRef>
-          <a:effectRef idx="2">
-            <a:schemeClr val="accent1"/>
-          </a:effectRef>
-          <a:fontRef idx="minor">
-            <a:schemeClr val="lt1"/>
-          </a:fontRef>
-        </p:style>
-        <p:txBody>
-          <a:bodyPr rtlCol="0" anchor="ctr"/>
-          <a:lstStyle/>
-          <a:p>
-            <a:pPr algn="ctr"/>
-          </a:p>
-        </p:txBody>
-      </p:sp>
-      <p:sp>
-        <p:nvSpPr>
-          <p:cNvPr id="13" name="Oval 12"/>
-          <p:cNvSpPr/>
-          <p:nvPr/>
-        </p:nvSpPr>
-        <p:spPr>
-          <a:xfrm>
-            <a:off x="621792" y="5097779"/>
-            <a:ext cx="310896" cy="310896"/>
-          </a:xfrm>
-          <a:prstGeom prst="ellipse">
-            <a:avLst/>
-          </a:prstGeom>
-          <a:solidFill>
-            <a:srgbClr val="009CD6"/>
-          </a:solidFill>
-          <a:ln>
-            <a:noFill/>
-          </a:ln>
-          <a:effectLst/>
-        </p:spPr>
-        <p:style>
-          <a:lnRef idx="1">
-            <a:schemeClr val="accent1"/>
-          </a:lnRef>
-          <a:fillRef idx="3">
-            <a:schemeClr val="accent1"/>
-          </a:fillRef>
-          <a:effectRef idx="2">
-            <a:schemeClr val="accent1"/>
-          </a:effectRef>
-          <a:fontRef idx="minor">
-            <a:schemeClr val="lt1"/>
-          </a:fontRef>
-        </p:style>
-        <p:txBody>
-          <a:bodyPr rtlCol="0" anchor="ctr" lIns="0" rIns="0" tIns="0" bIns="0" wrap="square"/>
-          <a:lstStyle/>
-          <a:p>
-            <a:pPr algn="ctr"/>
-            <a:r>
-              <a:rPr sz="1300" b="1" i="0">
-                <a:solidFill>
-                  <a:srgbClr val="FFFFFF"/>
-                </a:solidFill>
-                <a:latin typeface="Arial"/>
-              </a:rPr>
-              <a:t>4</a:t>
-            </a:r>
-          </a:p>
-        </p:txBody>
-      </p:sp>
-      <p:sp>
-        <p:nvSpPr>
-          <p:cNvPr id="14" name="TextBox 13"/>
-          <p:cNvSpPr txBox="1"/>
-          <p:nvPr/>
-        </p:nvSpPr>
-        <p:spPr>
-          <a:xfrm>
-            <a:off x="1115568" y="5052059"/>
-            <a:ext cx="10527487" cy="1165860"/>
-          </a:xfrm>
-          <a:prstGeom prst="rect">
-            <a:avLst/>
-          </a:prstGeom>
-          <a:noFill/>
-        </p:spPr>
-        <p:txBody>
-          <a:bodyPr wrap="square">
-            <a:spAutoFit/>
-          </a:bodyPr>
-          <a:lstStyle/>
-          <a:p>
-            <a:pPr>
-              <a:spcAft>
-                <a:spcPts val="300"/>
-              </a:spcAft>
-            </a:pPr>
-            <a:r>
-              <a:rPr sz="1900" b="1" i="0">
-                <a:solidFill>
-                  <a:srgbClr val="1A1A1A"/>
-                </a:solidFill>
-                <a:latin typeface="Arial"/>
-              </a:rPr>
-              <a:t>Ministries that do not connect across each other</a:t>
-            </a:r>
-          </a:p>
-          <a:p>
-            <a:pPr>
-              <a:spcAft>
-                <a:spcPts val="300"/>
-              </a:spcAft>
-            </a:pPr>
-            <a:r>
-              <a:rPr sz="1550" b="0" i="0">
-                <a:solidFill>
-                  <a:srgbClr val="595959"/>
-                </a:solidFill>
-                <a:latin typeface="Arial"/>
-              </a:rPr>
-              <a:t>The citizen who gave her ID number to the health ministry gives it again, on paper, when she enrols her child in school. “Ask once” exists on paper only.</a:t>
-            </a:r>
-          </a:p>
-        </p:txBody>
-      </p:sp>
-      <p:sp>
-        <p:nvSpPr>
-          <p:cNvPr id="15" name="TextBox 14"/>
+          <p:cNvPr id="5" name="TextBox 4"/>
           <p:cNvSpPr txBox="1"/>
           <p:nvPr/>
         </p:nvSpPr>
@@ -13260,6 +11869,41 @@
                 <a:latin typeface="Arial"/>
               </a:rPr>
               <a:t>1.1 · Why your country needs a national EA</a:t>
+            </a:r>
+          </a:p>
+        </p:txBody>
+      </p:sp>
+      <p:sp>
+        <p:nvSpPr>
+          <p:cNvPr id="6" name="TextBox 5"/>
+          <p:cNvSpPr txBox="1"/>
+          <p:nvPr/>
+        </p:nvSpPr>
+        <p:spPr>
+          <a:xfrm>
+            <a:off x="10058400" y="6473952"/>
+            <a:ext cx="1673352" cy="292608"/>
+          </a:xfrm>
+          <a:prstGeom prst="rect">
+            <a:avLst/>
+          </a:prstGeom>
+          <a:noFill/>
+        </p:spPr>
+        <p:txBody>
+          <a:bodyPr wrap="square">
+            <a:spAutoFit/>
+          </a:bodyPr>
+          <a:lstStyle/>
+          <a:p>
+            <a:pPr algn="r"/>
+            <a:r>
+              <a:rPr sz="900" b="0" i="0">
+                <a:solidFill>
+                  <a:srgbClr val="595959"/>
+                </a:solidFill>
+                <a:latin typeface="Arial"/>
+              </a:rPr>
+              <a:t>www.itu.int</a:t>
             </a:r>
           </a:p>
         </p:txBody>
@@ -13355,29 +11999,135 @@
                 </a:solidFill>
                 <a:latin typeface="Arial"/>
               </a:rPr>
-              <a:t>The country pays in four directions at once</a:t>
+              <a:t>Four signs your government has no shared plan</a:t>
             </a:r>
           </a:p>
         </p:txBody>
       </p:sp>
       <p:sp>
         <p:nvSpPr>
-          <p:cNvPr id="4" name="Rounded Rectangle 3"/>
+          <p:cNvPr id="4" name="Oval 3"/>
           <p:cNvSpPr/>
           <p:nvPr/>
         </p:nvSpPr>
         <p:spPr>
           <a:xfrm>
-            <a:off x="658368" y="1508760"/>
-            <a:ext cx="5394960" cy="2240280"/>
-          </a:xfrm>
-          <a:prstGeom prst="roundRect">
-            <a:avLst>
-              <a:gd name="adj" fmla="val 4500"/>
-            </a:avLst>
+            <a:off x="621792" y="1463040"/>
+            <a:ext cx="310896" cy="310896"/>
+          </a:xfrm>
+          <a:prstGeom prst="ellipse">
+            <a:avLst/>
           </a:prstGeom>
           <a:solidFill>
-            <a:srgbClr val="E5F5FB"/>
+            <a:srgbClr val="009CD6"/>
+          </a:solidFill>
+          <a:ln>
+            <a:noFill/>
+          </a:ln>
+          <a:effectLst/>
+        </p:spPr>
+        <p:style>
+          <a:lnRef idx="1">
+            <a:schemeClr val="accent1"/>
+          </a:lnRef>
+          <a:fillRef idx="3">
+            <a:schemeClr val="accent1"/>
+          </a:fillRef>
+          <a:effectRef idx="2">
+            <a:schemeClr val="accent1"/>
+          </a:effectRef>
+          <a:fontRef idx="minor">
+            <a:schemeClr val="lt1"/>
+          </a:fontRef>
+        </p:style>
+        <p:txBody>
+          <a:bodyPr rtlCol="0" anchor="ctr" lIns="0" rIns="0" tIns="0" bIns="0" wrap="square"/>
+          <a:lstStyle/>
+          <a:p>
+            <a:pPr algn="ctr"/>
+            <a:r>
+              <a:rPr sz="1300" b="1" i="0">
+                <a:solidFill>
+                  <a:srgbClr val="FFFFFF"/>
+                </a:solidFill>
+                <a:latin typeface="Arial"/>
+              </a:rPr>
+              <a:t>1</a:t>
+            </a:r>
+          </a:p>
+        </p:txBody>
+      </p:sp>
+      <p:sp>
+        <p:nvSpPr>
+          <p:cNvPr id="5" name="TextBox 4"/>
+          <p:cNvSpPr txBox="1"/>
+          <p:nvPr/>
+        </p:nvSpPr>
+        <p:spPr>
+          <a:xfrm>
+            <a:off x="1115568" y="1417320"/>
+            <a:ext cx="10527487" cy="1165860"/>
+          </a:xfrm>
+          <a:prstGeom prst="rect">
+            <a:avLst/>
+          </a:prstGeom>
+          <a:noFill/>
+        </p:spPr>
+        <p:txBody>
+          <a:bodyPr wrap="square">
+            <a:spAutoFit/>
+          </a:bodyPr>
+          <a:lstStyle/>
+          <a:p>
+            <a:pPr>
+              <a:spcAft>
+                <a:spcPts val="300"/>
+              </a:spcAft>
+            </a:pPr>
+            <a:r>
+              <a:rPr sz="1900" b="1" i="0">
+                <a:solidFill>
+                  <a:srgbClr val="1A1A1A"/>
+                </a:solidFill>
+                <a:latin typeface="Arial"/>
+              </a:rPr>
+              <a:t>More than one register of the same people</a:t>
+            </a:r>
+          </a:p>
+          <a:p>
+            <a:pPr>
+              <a:spcAft>
+                <a:spcPts val="300"/>
+              </a:spcAft>
+            </a:pPr>
+            <a:r>
+              <a:rPr sz="1550" b="0" i="0">
+                <a:solidFill>
+                  <a:srgbClr val="595959"/>
+                </a:solidFill>
+                <a:latin typeface="Arial"/>
+              </a:rPr>
+              <a:t>The school list has one. The national ID register has another. The social register has a third. None of them agree.</a:t>
+            </a:r>
+          </a:p>
+        </p:txBody>
+      </p:sp>
+      <p:sp>
+        <p:nvSpPr>
+          <p:cNvPr id="6" name="Rectangle 5"/>
+          <p:cNvSpPr/>
+          <p:nvPr/>
+        </p:nvSpPr>
+        <p:spPr>
+          <a:xfrm>
+            <a:off x="621792" y="2587752"/>
+            <a:ext cx="10881360" cy="12700"/>
+          </a:xfrm>
+          <a:prstGeom prst="rect">
+            <a:avLst/>
+          </a:prstGeom>
+          <a:solidFill>
+            <a:srgbClr val="DDECF4"/>
           </a:solidFill>
           <a:ln>
             <a:noFill/>
@@ -13408,14 +12158,67 @@
       </p:sp>
       <p:sp>
         <p:nvSpPr>
-          <p:cNvPr id="5" name="TextBox 4"/>
+          <p:cNvPr id="7" name="Oval 6"/>
+          <p:cNvSpPr/>
+          <p:nvPr/>
+        </p:nvSpPr>
+        <p:spPr>
+          <a:xfrm>
+            <a:off x="621792" y="2674620"/>
+            <a:ext cx="310896" cy="310896"/>
+          </a:xfrm>
+          <a:prstGeom prst="ellipse">
+            <a:avLst/>
+          </a:prstGeom>
+          <a:solidFill>
+            <a:srgbClr val="009CD6"/>
+          </a:solidFill>
+          <a:ln>
+            <a:noFill/>
+          </a:ln>
+          <a:effectLst/>
+        </p:spPr>
+        <p:style>
+          <a:lnRef idx="1">
+            <a:schemeClr val="accent1"/>
+          </a:lnRef>
+          <a:fillRef idx="3">
+            <a:schemeClr val="accent1"/>
+          </a:fillRef>
+          <a:effectRef idx="2">
+            <a:schemeClr val="accent1"/>
+          </a:effectRef>
+          <a:fontRef idx="minor">
+            <a:schemeClr val="lt1"/>
+          </a:fontRef>
+        </p:style>
+        <p:txBody>
+          <a:bodyPr rtlCol="0" anchor="ctr" lIns="0" rIns="0" tIns="0" bIns="0" wrap="square"/>
+          <a:lstStyle/>
+          <a:p>
+            <a:pPr algn="ctr"/>
+            <a:r>
+              <a:rPr sz="1300" b="1" i="0">
+                <a:solidFill>
+                  <a:srgbClr val="FFFFFF"/>
+                </a:solidFill>
+                <a:latin typeface="Arial"/>
+              </a:rPr>
+              <a:t>2</a:t>
+            </a:r>
+          </a:p>
+        </p:txBody>
+      </p:sp>
+      <p:sp>
+        <p:nvSpPr>
+          <p:cNvPr id="8" name="TextBox 7"/>
           <p:cNvSpPr txBox="1"/>
           <p:nvPr/>
         </p:nvSpPr>
         <p:spPr>
           <a:xfrm>
-            <a:off x="859536" y="1655063"/>
-            <a:ext cx="4992624" cy="1965960"/>
+            <a:off x="1115568" y="2628900"/>
+            <a:ext cx="10527487" cy="1165860"/>
           </a:xfrm>
           <a:prstGeom prst="rect">
             <a:avLst/>
@@ -13430,55 +12233,53 @@
           <a:p>
             <a:pPr>
               <a:spcAft>
-                <a:spcPts val="700"/>
+                <a:spcPts val="300"/>
               </a:spcAft>
             </a:pPr>
             <a:r>
-              <a:rPr sz="2000" b="1" i="0">
+              <a:rPr sz="1900" b="1" i="0">
                 <a:solidFill>
                   <a:srgbClr val="1A1A1A"/>
                 </a:solidFill>
                 <a:latin typeface="Arial"/>
               </a:rPr>
-              <a:t>Money</a:t>
+              <a:t>Every system-to-system link built from scratch</a:t>
             </a:r>
           </a:p>
           <a:p>
             <a:pPr>
               <a:spcAft>
-                <a:spcPts val="700"/>
+                <a:spcPts val="300"/>
               </a:spcAft>
             </a:pPr>
             <a:r>
-              <a:rPr sz="1500" b="0" i="0">
+              <a:rPr sz="1550" b="0" i="0">
                 <a:solidFill>
                   <a:srgbClr val="595959"/>
                 </a:solidFill>
                 <a:latin typeface="Arial"/>
               </a:rPr>
-              <a:t>The same systems built many times over.</a:t>
+              <a:t>Last year your team connected the tax office to the business register. This year, the same work again — for the health ministry.</a:t>
             </a:r>
           </a:p>
         </p:txBody>
       </p:sp>
       <p:sp>
         <p:nvSpPr>
-          <p:cNvPr id="6" name="Rounded Rectangle 5"/>
+          <p:cNvPr id="9" name="Rectangle 8"/>
           <p:cNvSpPr/>
           <p:nvPr/>
         </p:nvSpPr>
         <p:spPr>
           <a:xfrm>
-            <a:off x="6281928" y="1508760"/>
-            <a:ext cx="5394960" cy="2240280"/>
-          </a:xfrm>
-          <a:prstGeom prst="roundRect">
-            <a:avLst>
-              <a:gd name="adj" fmla="val 4500"/>
-            </a:avLst>
+            <a:off x="621792" y="3799332"/>
+            <a:ext cx="10881360" cy="12700"/>
+          </a:xfrm>
+          <a:prstGeom prst="rect">
+            <a:avLst/>
           </a:prstGeom>
           <a:solidFill>
-            <a:srgbClr val="E5F5FB"/>
+            <a:srgbClr val="DDECF4"/>
           </a:solidFill>
           <a:ln>
             <a:noFill/>
@@ -13509,14 +12310,67 @@
       </p:sp>
       <p:sp>
         <p:nvSpPr>
-          <p:cNvPr id="7" name="TextBox 6"/>
+          <p:cNvPr id="10" name="Oval 9"/>
+          <p:cNvSpPr/>
+          <p:nvPr/>
+        </p:nvSpPr>
+        <p:spPr>
+          <a:xfrm>
+            <a:off x="621792" y="3886200"/>
+            <a:ext cx="310896" cy="310896"/>
+          </a:xfrm>
+          <a:prstGeom prst="ellipse">
+            <a:avLst/>
+          </a:prstGeom>
+          <a:solidFill>
+            <a:srgbClr val="009CD6"/>
+          </a:solidFill>
+          <a:ln>
+            <a:noFill/>
+          </a:ln>
+          <a:effectLst/>
+        </p:spPr>
+        <p:style>
+          <a:lnRef idx="1">
+            <a:schemeClr val="accent1"/>
+          </a:lnRef>
+          <a:fillRef idx="3">
+            <a:schemeClr val="accent1"/>
+          </a:fillRef>
+          <a:effectRef idx="2">
+            <a:schemeClr val="accent1"/>
+          </a:effectRef>
+          <a:fontRef idx="minor">
+            <a:schemeClr val="lt1"/>
+          </a:fontRef>
+        </p:style>
+        <p:txBody>
+          <a:bodyPr rtlCol="0" anchor="ctr" lIns="0" rIns="0" tIns="0" bIns="0" wrap="square"/>
+          <a:lstStyle/>
+          <a:p>
+            <a:pPr algn="ctr"/>
+            <a:r>
+              <a:rPr sz="1300" b="1" i="0">
+                <a:solidFill>
+                  <a:srgbClr val="FFFFFF"/>
+                </a:solidFill>
+                <a:latin typeface="Arial"/>
+              </a:rPr>
+              <a:t>3</a:t>
+            </a:r>
+          </a:p>
+        </p:txBody>
+      </p:sp>
+      <p:sp>
+        <p:nvSpPr>
+          <p:cNvPr id="11" name="TextBox 10"/>
           <p:cNvSpPr txBox="1"/>
           <p:nvPr/>
         </p:nvSpPr>
         <p:spPr>
           <a:xfrm>
-            <a:off x="6483096" y="1655063"/>
-            <a:ext cx="4992624" cy="1965960"/>
+            <a:off x="1115568" y="3840480"/>
+            <a:ext cx="10527487" cy="1165860"/>
           </a:xfrm>
           <a:prstGeom prst="rect">
             <a:avLst/>
@@ -13531,55 +12385,53 @@
           <a:p>
             <a:pPr>
               <a:spcAft>
-                <a:spcPts val="700"/>
+                <a:spcPts val="300"/>
               </a:spcAft>
             </a:pPr>
             <a:r>
-              <a:rPr sz="2000" b="1" i="0">
+              <a:rPr sz="1900" b="1" i="0">
                 <a:solidFill>
                   <a:srgbClr val="1A1A1A"/>
                 </a:solidFill>
                 <a:latin typeface="Arial"/>
               </a:rPr>
-              <a:t>Time</a:t>
+              <a:t>Vendor lock-in on systems built years ago</a:t>
             </a:r>
           </a:p>
           <a:p>
             <a:pPr>
               <a:spcAft>
-                <a:spcPts val="700"/>
+                <a:spcPts val="300"/>
               </a:spcAft>
             </a:pPr>
             <a:r>
-              <a:rPr sz="1500" b="0" i="0">
+              <a:rPr sz="1550" b="0" i="0">
                 <a:solidFill>
                   <a:srgbClr val="595959"/>
                 </a:solidFill>
                 <a:latin typeface="Arial"/>
               </a:rPr>
-              <a:t>Every new programme waits for cross-system work nobody planned for.</a:t>
+              <a:t>One vendor built it ten years ago. To change anything, you call that vendor and pay what they ask. The vendor knows this, and prices accordingly.</a:t>
             </a:r>
           </a:p>
         </p:txBody>
       </p:sp>
       <p:sp>
         <p:nvSpPr>
-          <p:cNvPr id="8" name="Rounded Rectangle 7"/>
+          <p:cNvPr id="12" name="Rectangle 11"/>
           <p:cNvSpPr/>
           <p:nvPr/>
         </p:nvSpPr>
         <p:spPr>
           <a:xfrm>
-            <a:off x="658368" y="3977639"/>
-            <a:ext cx="5394960" cy="2240280"/>
-          </a:xfrm>
-          <a:prstGeom prst="roundRect">
-            <a:avLst>
-              <a:gd name="adj" fmla="val 4500"/>
-            </a:avLst>
+            <a:off x="621792" y="5010912"/>
+            <a:ext cx="10881360" cy="12700"/>
+          </a:xfrm>
+          <a:prstGeom prst="rect">
+            <a:avLst/>
           </a:prstGeom>
           <a:solidFill>
-            <a:srgbClr val="E5F5FB"/>
+            <a:srgbClr val="DDECF4"/>
           </a:solidFill>
           <a:ln>
             <a:noFill/>
@@ -13610,14 +12462,67 @@
       </p:sp>
       <p:sp>
         <p:nvSpPr>
-          <p:cNvPr id="9" name="TextBox 8"/>
+          <p:cNvPr id="13" name="Oval 12"/>
+          <p:cNvSpPr/>
+          <p:nvPr/>
+        </p:nvSpPr>
+        <p:spPr>
+          <a:xfrm>
+            <a:off x="621792" y="5097779"/>
+            <a:ext cx="310896" cy="310896"/>
+          </a:xfrm>
+          <a:prstGeom prst="ellipse">
+            <a:avLst/>
+          </a:prstGeom>
+          <a:solidFill>
+            <a:srgbClr val="009CD6"/>
+          </a:solidFill>
+          <a:ln>
+            <a:noFill/>
+          </a:ln>
+          <a:effectLst/>
+        </p:spPr>
+        <p:style>
+          <a:lnRef idx="1">
+            <a:schemeClr val="accent1"/>
+          </a:lnRef>
+          <a:fillRef idx="3">
+            <a:schemeClr val="accent1"/>
+          </a:fillRef>
+          <a:effectRef idx="2">
+            <a:schemeClr val="accent1"/>
+          </a:effectRef>
+          <a:fontRef idx="minor">
+            <a:schemeClr val="lt1"/>
+          </a:fontRef>
+        </p:style>
+        <p:txBody>
+          <a:bodyPr rtlCol="0" anchor="ctr" lIns="0" rIns="0" tIns="0" bIns="0" wrap="square"/>
+          <a:lstStyle/>
+          <a:p>
+            <a:pPr algn="ctr"/>
+            <a:r>
+              <a:rPr sz="1300" b="1" i="0">
+                <a:solidFill>
+                  <a:srgbClr val="FFFFFF"/>
+                </a:solidFill>
+                <a:latin typeface="Arial"/>
+              </a:rPr>
+              <a:t>4</a:t>
+            </a:r>
+          </a:p>
+        </p:txBody>
+      </p:sp>
+      <p:sp>
+        <p:nvSpPr>
+          <p:cNvPr id="14" name="TextBox 13"/>
           <p:cNvSpPr txBox="1"/>
           <p:nvPr/>
         </p:nvSpPr>
         <p:spPr>
           <a:xfrm>
-            <a:off x="859536" y="4123944"/>
-            <a:ext cx="4992624" cy="1965960"/>
+            <a:off x="1115568" y="5052059"/>
+            <a:ext cx="10527487" cy="1165860"/>
           </a:xfrm>
           <a:prstGeom prst="rect">
             <a:avLst/>
@@ -13632,52 +12537,102 @@
           <a:p>
             <a:pPr>
               <a:spcAft>
-                <a:spcPts val="700"/>
+                <a:spcPts val="300"/>
               </a:spcAft>
             </a:pPr>
             <a:r>
-              <a:rPr sz="2000" b="1" i="0">
+              <a:rPr sz="1900" b="1" i="0">
                 <a:solidFill>
                   <a:srgbClr val="1A1A1A"/>
                 </a:solidFill>
                 <a:latin typeface="Arial"/>
               </a:rPr>
-              <a:t>Citizens</a:t>
+              <a:t>Ministries that do not connect across each other</a:t>
             </a:r>
           </a:p>
           <a:p>
             <a:pPr>
               <a:spcAft>
-                <a:spcPts val="700"/>
+                <a:spcPts val="300"/>
               </a:spcAft>
             </a:pPr>
             <a:r>
-              <a:rPr sz="1500" b="0" i="0">
+              <a:rPr sz="1550" b="0" i="0">
                 <a:solidFill>
                   <a:srgbClr val="595959"/>
                 </a:solidFill>
                 <a:latin typeface="Arial"/>
               </a:rPr>
-              <a:t>The same form, filled in five places.</a:t>
+              <a:t>The citizen who gave her ID number to the health ministry gives it again, on paper, when she enrols her child in school. “Ask once” exists on paper only.</a:t>
             </a:r>
           </a:p>
         </p:txBody>
       </p:sp>
       <p:sp>
         <p:nvSpPr>
-          <p:cNvPr id="10" name="Rounded Rectangle 9"/>
+          <p:cNvPr id="15" name="TextBox 14"/>
+          <p:cNvSpPr txBox="1"/>
+          <p:nvPr/>
+        </p:nvSpPr>
+        <p:spPr>
+          <a:xfrm>
+            <a:off x="457200" y="6473952"/>
+            <a:ext cx="7772400" cy="292608"/>
+          </a:xfrm>
+          <a:prstGeom prst="rect">
+            <a:avLst/>
+          </a:prstGeom>
+          <a:noFill/>
+        </p:spPr>
+        <p:txBody>
+          <a:bodyPr wrap="square">
+            <a:spAutoFit/>
+          </a:bodyPr>
+          <a:lstStyle/>
+          <a:p>
+            <a:r>
+              <a:rPr sz="900" b="0" i="0">
+                <a:solidFill>
+                  <a:srgbClr val="595959"/>
+                </a:solidFill>
+                <a:latin typeface="Arial"/>
+              </a:rPr>
+              <a:t>1.1 · Why your country needs a national EA</a:t>
+            </a:r>
+          </a:p>
+        </p:txBody>
+      </p:sp>
+    </p:spTree>
+  </p:cSld>
+  <p:clrMapOvr>
+    <a:masterClrMapping/>
+  </p:clrMapOvr>
+</p:sld>
+</file>
+
+<file path=ppt/slides/slide6.xml><?xml version="1.0" encoding="utf-8"?>
+<p:sld xmlns:a="http://schemas.openxmlformats.org/drawingml/2006/main" xmlns:p="http://schemas.openxmlformats.org/presentationml/2006/main" xmlns:r="http://schemas.openxmlformats.org/officeDocument/2006/relationships">
+  <p:cSld>
+    <p:spTree>
+      <p:nvGrpSpPr>
+        <p:cNvPr id="1" name=""/>
+        <p:cNvGrpSpPr/>
+        <p:nvPr/>
+      </p:nvGrpSpPr>
+      <p:grpSpPr/>
+      <p:sp>
+        <p:nvSpPr>
+          <p:cNvPr id="2" name="Rectangle 1"/>
           <p:cNvSpPr/>
           <p:nvPr/>
         </p:nvSpPr>
         <p:spPr>
           <a:xfrm>
-            <a:off x="6281928" y="3977639"/>
-            <a:ext cx="5394960" cy="2240280"/>
-          </a:xfrm>
-          <a:prstGeom prst="roundRect">
-            <a:avLst>
-              <a:gd name="adj" fmla="val 4500"/>
-            </a:avLst>
+            <a:off x="457200" y="384048"/>
+            <a:ext cx="45720" cy="256032"/>
+          </a:xfrm>
+          <a:prstGeom prst="rect">
+            <a:avLst/>
           </a:prstGeom>
           <a:solidFill>
             <a:srgbClr val="009CD6"/>
@@ -13711,6 +12666,389 @@
       </p:sp>
       <p:sp>
         <p:nvSpPr>
+          <p:cNvPr id="3" name="TextBox 2"/>
+          <p:cNvSpPr txBox="1"/>
+          <p:nvPr/>
+        </p:nvSpPr>
+        <p:spPr>
+          <a:xfrm>
+            <a:off x="621792" y="274320"/>
+            <a:ext cx="11247120" cy="914400"/>
+          </a:xfrm>
+          <a:prstGeom prst="rect">
+            <a:avLst/>
+          </a:prstGeom>
+          <a:noFill/>
+        </p:spPr>
+        <p:txBody>
+          <a:bodyPr wrap="square">
+            <a:spAutoFit/>
+          </a:bodyPr>
+          <a:lstStyle/>
+          <a:p>
+            <a:r>
+              <a:rPr sz="2800" b="1" i="0">
+                <a:solidFill>
+                  <a:srgbClr val="1A1A1A"/>
+                </a:solidFill>
+                <a:latin typeface="Arial"/>
+              </a:rPr>
+              <a:t>The country pays in four directions at once</a:t>
+            </a:r>
+          </a:p>
+        </p:txBody>
+      </p:sp>
+      <p:sp>
+        <p:nvSpPr>
+          <p:cNvPr id="4" name="Rounded Rectangle 3"/>
+          <p:cNvSpPr/>
+          <p:nvPr/>
+        </p:nvSpPr>
+        <p:spPr>
+          <a:xfrm>
+            <a:off x="658368" y="1508760"/>
+            <a:ext cx="5394960" cy="2240280"/>
+          </a:xfrm>
+          <a:prstGeom prst="roundRect">
+            <a:avLst>
+              <a:gd name="adj" fmla="val 4500"/>
+            </a:avLst>
+          </a:prstGeom>
+          <a:solidFill>
+            <a:srgbClr val="E5F5FB"/>
+          </a:solidFill>
+          <a:ln>
+            <a:noFill/>
+          </a:ln>
+          <a:effectLst/>
+        </p:spPr>
+        <p:style>
+          <a:lnRef idx="1">
+            <a:schemeClr val="accent1"/>
+          </a:lnRef>
+          <a:fillRef idx="3">
+            <a:schemeClr val="accent1"/>
+          </a:fillRef>
+          <a:effectRef idx="2">
+            <a:schemeClr val="accent1"/>
+          </a:effectRef>
+          <a:fontRef idx="minor">
+            <a:schemeClr val="lt1"/>
+          </a:fontRef>
+        </p:style>
+        <p:txBody>
+          <a:bodyPr rtlCol="0" anchor="ctr"/>
+          <a:lstStyle/>
+          <a:p>
+            <a:pPr algn="ctr"/>
+          </a:p>
+        </p:txBody>
+      </p:sp>
+      <p:sp>
+        <p:nvSpPr>
+          <p:cNvPr id="5" name="TextBox 4"/>
+          <p:cNvSpPr txBox="1"/>
+          <p:nvPr/>
+        </p:nvSpPr>
+        <p:spPr>
+          <a:xfrm>
+            <a:off x="859536" y="1655063"/>
+            <a:ext cx="4992624" cy="1965960"/>
+          </a:xfrm>
+          <a:prstGeom prst="rect">
+            <a:avLst/>
+          </a:prstGeom>
+          <a:noFill/>
+        </p:spPr>
+        <p:txBody>
+          <a:bodyPr wrap="square">
+            <a:spAutoFit/>
+          </a:bodyPr>
+          <a:lstStyle/>
+          <a:p>
+            <a:pPr>
+              <a:spcAft>
+                <a:spcPts val="700"/>
+              </a:spcAft>
+            </a:pPr>
+            <a:r>
+              <a:rPr sz="2000" b="1" i="0">
+                <a:solidFill>
+                  <a:srgbClr val="1A1A1A"/>
+                </a:solidFill>
+                <a:latin typeface="Arial"/>
+              </a:rPr>
+              <a:t>Money</a:t>
+            </a:r>
+          </a:p>
+          <a:p>
+            <a:pPr>
+              <a:spcAft>
+                <a:spcPts val="700"/>
+              </a:spcAft>
+            </a:pPr>
+            <a:r>
+              <a:rPr sz="1500" b="0" i="0">
+                <a:solidFill>
+                  <a:srgbClr val="595959"/>
+                </a:solidFill>
+                <a:latin typeface="Arial"/>
+              </a:rPr>
+              <a:t>The same systems built many times over.</a:t>
+            </a:r>
+          </a:p>
+        </p:txBody>
+      </p:sp>
+      <p:sp>
+        <p:nvSpPr>
+          <p:cNvPr id="6" name="Rounded Rectangle 5"/>
+          <p:cNvSpPr/>
+          <p:nvPr/>
+        </p:nvSpPr>
+        <p:spPr>
+          <a:xfrm>
+            <a:off x="6281928" y="1508760"/>
+            <a:ext cx="5394960" cy="2240280"/>
+          </a:xfrm>
+          <a:prstGeom prst="roundRect">
+            <a:avLst>
+              <a:gd name="adj" fmla="val 4500"/>
+            </a:avLst>
+          </a:prstGeom>
+          <a:solidFill>
+            <a:srgbClr val="E5F5FB"/>
+          </a:solidFill>
+          <a:ln>
+            <a:noFill/>
+          </a:ln>
+          <a:effectLst/>
+        </p:spPr>
+        <p:style>
+          <a:lnRef idx="1">
+            <a:schemeClr val="accent1"/>
+          </a:lnRef>
+          <a:fillRef idx="3">
+            <a:schemeClr val="accent1"/>
+          </a:fillRef>
+          <a:effectRef idx="2">
+            <a:schemeClr val="accent1"/>
+          </a:effectRef>
+          <a:fontRef idx="minor">
+            <a:schemeClr val="lt1"/>
+          </a:fontRef>
+        </p:style>
+        <p:txBody>
+          <a:bodyPr rtlCol="0" anchor="ctr"/>
+          <a:lstStyle/>
+          <a:p>
+            <a:pPr algn="ctr"/>
+          </a:p>
+        </p:txBody>
+      </p:sp>
+      <p:sp>
+        <p:nvSpPr>
+          <p:cNvPr id="7" name="TextBox 6"/>
+          <p:cNvSpPr txBox="1"/>
+          <p:nvPr/>
+        </p:nvSpPr>
+        <p:spPr>
+          <a:xfrm>
+            <a:off x="6483096" y="1655063"/>
+            <a:ext cx="4992624" cy="1965960"/>
+          </a:xfrm>
+          <a:prstGeom prst="rect">
+            <a:avLst/>
+          </a:prstGeom>
+          <a:noFill/>
+        </p:spPr>
+        <p:txBody>
+          <a:bodyPr wrap="square">
+            <a:spAutoFit/>
+          </a:bodyPr>
+          <a:lstStyle/>
+          <a:p>
+            <a:pPr>
+              <a:spcAft>
+                <a:spcPts val="700"/>
+              </a:spcAft>
+            </a:pPr>
+            <a:r>
+              <a:rPr sz="2000" b="1" i="0">
+                <a:solidFill>
+                  <a:srgbClr val="1A1A1A"/>
+                </a:solidFill>
+                <a:latin typeface="Arial"/>
+              </a:rPr>
+              <a:t>Time</a:t>
+            </a:r>
+          </a:p>
+          <a:p>
+            <a:pPr>
+              <a:spcAft>
+                <a:spcPts val="700"/>
+              </a:spcAft>
+            </a:pPr>
+            <a:r>
+              <a:rPr sz="1500" b="0" i="0">
+                <a:solidFill>
+                  <a:srgbClr val="595959"/>
+                </a:solidFill>
+                <a:latin typeface="Arial"/>
+              </a:rPr>
+              <a:t>Every new programme waits for cross-system work nobody planned for.</a:t>
+            </a:r>
+          </a:p>
+        </p:txBody>
+      </p:sp>
+      <p:sp>
+        <p:nvSpPr>
+          <p:cNvPr id="8" name="Rounded Rectangle 7"/>
+          <p:cNvSpPr/>
+          <p:nvPr/>
+        </p:nvSpPr>
+        <p:spPr>
+          <a:xfrm>
+            <a:off x="658368" y="3977639"/>
+            <a:ext cx="5394960" cy="2240280"/>
+          </a:xfrm>
+          <a:prstGeom prst="roundRect">
+            <a:avLst>
+              <a:gd name="adj" fmla="val 4500"/>
+            </a:avLst>
+          </a:prstGeom>
+          <a:solidFill>
+            <a:srgbClr val="E5F5FB"/>
+          </a:solidFill>
+          <a:ln>
+            <a:noFill/>
+          </a:ln>
+          <a:effectLst/>
+        </p:spPr>
+        <p:style>
+          <a:lnRef idx="1">
+            <a:schemeClr val="accent1"/>
+          </a:lnRef>
+          <a:fillRef idx="3">
+            <a:schemeClr val="accent1"/>
+          </a:fillRef>
+          <a:effectRef idx="2">
+            <a:schemeClr val="accent1"/>
+          </a:effectRef>
+          <a:fontRef idx="minor">
+            <a:schemeClr val="lt1"/>
+          </a:fontRef>
+        </p:style>
+        <p:txBody>
+          <a:bodyPr rtlCol="0" anchor="ctr"/>
+          <a:lstStyle/>
+          <a:p>
+            <a:pPr algn="ctr"/>
+          </a:p>
+        </p:txBody>
+      </p:sp>
+      <p:sp>
+        <p:nvSpPr>
+          <p:cNvPr id="9" name="TextBox 8"/>
+          <p:cNvSpPr txBox="1"/>
+          <p:nvPr/>
+        </p:nvSpPr>
+        <p:spPr>
+          <a:xfrm>
+            <a:off x="859536" y="4123944"/>
+            <a:ext cx="4992624" cy="1965960"/>
+          </a:xfrm>
+          <a:prstGeom prst="rect">
+            <a:avLst/>
+          </a:prstGeom>
+          <a:noFill/>
+        </p:spPr>
+        <p:txBody>
+          <a:bodyPr wrap="square">
+            <a:spAutoFit/>
+          </a:bodyPr>
+          <a:lstStyle/>
+          <a:p>
+            <a:pPr>
+              <a:spcAft>
+                <a:spcPts val="700"/>
+              </a:spcAft>
+            </a:pPr>
+            <a:r>
+              <a:rPr sz="2000" b="1" i="0">
+                <a:solidFill>
+                  <a:srgbClr val="1A1A1A"/>
+                </a:solidFill>
+                <a:latin typeface="Arial"/>
+              </a:rPr>
+              <a:t>Citizens</a:t>
+            </a:r>
+          </a:p>
+          <a:p>
+            <a:pPr>
+              <a:spcAft>
+                <a:spcPts val="700"/>
+              </a:spcAft>
+            </a:pPr>
+            <a:r>
+              <a:rPr sz="1500" b="0" i="0">
+                <a:solidFill>
+                  <a:srgbClr val="595959"/>
+                </a:solidFill>
+                <a:latin typeface="Arial"/>
+              </a:rPr>
+              <a:t>The same form, filled in five places.</a:t>
+            </a:r>
+          </a:p>
+        </p:txBody>
+      </p:sp>
+      <p:sp>
+        <p:nvSpPr>
+          <p:cNvPr id="10" name="Rounded Rectangle 9"/>
+          <p:cNvSpPr/>
+          <p:nvPr/>
+        </p:nvSpPr>
+        <p:spPr>
+          <a:xfrm>
+            <a:off x="6281928" y="3977639"/>
+            <a:ext cx="5394960" cy="2240280"/>
+          </a:xfrm>
+          <a:prstGeom prst="roundRect">
+            <a:avLst>
+              <a:gd name="adj" fmla="val 4500"/>
+            </a:avLst>
+          </a:prstGeom>
+          <a:solidFill>
+            <a:srgbClr val="009CD6"/>
+          </a:solidFill>
+          <a:ln>
+            <a:noFill/>
+          </a:ln>
+          <a:effectLst/>
+        </p:spPr>
+        <p:style>
+          <a:lnRef idx="1">
+            <a:schemeClr val="accent1"/>
+          </a:lnRef>
+          <a:fillRef idx="3">
+            <a:schemeClr val="accent1"/>
+          </a:fillRef>
+          <a:effectRef idx="2">
+            <a:schemeClr val="accent1"/>
+          </a:effectRef>
+          <a:fontRef idx="minor">
+            <a:schemeClr val="lt1"/>
+          </a:fontRef>
+        </p:style>
+        <p:txBody>
+          <a:bodyPr rtlCol="0" anchor="ctr"/>
+          <a:lstStyle/>
+          <a:p>
+            <a:pPr algn="ctr"/>
+          </a:p>
+        </p:txBody>
+      </p:sp>
+      <p:sp>
+        <p:nvSpPr>
           <p:cNvPr id="11" name="TextBox 10"/>
           <p:cNvSpPr txBox="1"/>
           <p:nvPr/>
@@ -13806,7 +13144,7 @@
 </p:sld>
 </file>
 
-<file path=ppt/slides/slide6.xml><?xml version="1.0" encoding="utf-8"?>
+<file path=ppt/slides/slide7.xml><?xml version="1.0" encoding="utf-8"?>
 <p:sld xmlns:a="http://schemas.openxmlformats.org/drawingml/2006/main" xmlns:p="http://schemas.openxmlformats.org/presentationml/2006/main" xmlns:r="http://schemas.openxmlformats.org/officeDocument/2006/relationships">
   <p:cSld>
     <p:spTree>
@@ -14148,7 +13486,7 @@
 </p:sld>
 </file>
 
-<file path=ppt/slides/slide7.xml><?xml version="1.0" encoding="utf-8"?>
+<file path=ppt/slides/slide8.xml><?xml version="1.0" encoding="utf-8"?>
 <p:sld xmlns:a="http://schemas.openxmlformats.org/drawingml/2006/main" xmlns:p="http://schemas.openxmlformats.org/presentationml/2006/main" xmlns:r="http://schemas.openxmlformats.org/officeDocument/2006/relationships">
   <p:cSld>
     <p:spTree>

--- a/10-Knowledge-Products/KP1-GEA/videos/module_1/en/decks/KP1_M1_1.1_Deck_v0.2.pptx
+++ b/10-Knowledge-Products/KP1-GEA/videos/module_1/en/decks/KP1_M1_1.1_Deck_v0.2.pptx
@@ -11541,7 +11541,7 @@
                 </a:solidFill>
                 <a:latin typeface="Arial"/>
               </a:rPr>
-              <a:t>KP1 · MODULE 1 · VIDEO 1.1</a:t>
+              <a:t>MODULE 1 · VIDEO 1.1</a:t>
             </a:r>
           </a:p>
         </p:txBody>
